--- a/make_presentation/templates/templates/flow/no_logo_10.pptx
+++ b/make_presentation/templates/templates/flow/no_logo_10.pptx
@@ -73,12 +73,12 @@
               <a:buNone/>
             </a:pPr>
             <a:r>
-              <a:rPr b="0" lang="ru-RU" sz="4400" spc="-1" strike="noStrike">
-                <a:latin typeface="Arial"/>
-              </a:rPr>
-              <a:t>Для перемещения страницы щёлкните мышью</a:t>
-            </a:r>
-            <a:endParaRPr b="0" lang="ru-RU" sz="4400" spc="-1" strike="noStrike">
+              <a:rPr b="0" lang="en-US" sz="4400" spc="-1" strike="noStrike">
+                <a:latin typeface="Arial"/>
+              </a:rPr>
+              <a:t>Click to move the slide</a:t>
+            </a:r>
+            <a:endParaRPr b="0" lang="en-US" sz="4400" spc="-1" strike="noStrike">
               <a:latin typeface="Arial"/>
             </a:endParaRPr>
           </a:p>
@@ -113,12 +113,12 @@
           </a:bodyPr>
           <a:p>
             <a:r>
-              <a:rPr b="0" lang="ru-RU" sz="2000" spc="-1" strike="noStrike">
-                <a:latin typeface="Arial"/>
-              </a:rPr>
-              <a:t>Для правки формата примечаний щёлкните мышью</a:t>
-            </a:r>
-            <a:endParaRPr b="0" lang="ru-RU" sz="2000" spc="-1" strike="noStrike">
+              <a:rPr b="0" lang="en-US" sz="2000" spc="-1" strike="noStrike">
+                <a:latin typeface="Arial"/>
+              </a:rPr>
+              <a:t>Click to edit the notes format</a:t>
+            </a:r>
+            <a:endParaRPr b="0" lang="en-US" sz="2000" spc="-1" strike="noStrike">
               <a:latin typeface="Arial"/>
             </a:endParaRPr>
           </a:p>
@@ -153,12 +153,12 @@
           </a:bodyPr>
           <a:p>
             <a:r>
-              <a:rPr b="0" lang="ru-RU" sz="1400" spc="-1" strike="noStrike">
+              <a:rPr b="0" lang="en-US" sz="1400" spc="-1" strike="noStrike">
                 <a:latin typeface="Times New Roman"/>
               </a:rPr>
-              <a:t>&lt;верхний колонтитул&gt;</a:t>
-            </a:r>
-            <a:endParaRPr b="0" lang="ru-RU" sz="1400" spc="-1" strike="noStrike">
+              <a:t>&lt;header&gt;</a:t>
+            </a:r>
+            <a:endParaRPr b="0" lang="en-US" sz="1400" spc="-1" strike="noStrike">
               <a:latin typeface="Times New Roman"/>
             </a:endParaRPr>
           </a:p>
@@ -194,7 +194,7 @@
           <a:lstStyle>
             <a:lvl1pPr algn="r">
               <a:buNone/>
-              <a:defRPr b="0" lang="ru-RU" sz="1400" spc="-1" strike="noStrike">
+              <a:defRPr b="0" lang="en-US" sz="1400" spc="-1" strike="noStrike">
                 <a:latin typeface="Times New Roman"/>
               </a:defRPr>
             </a:lvl1pPr>
@@ -204,12 +204,12 @@
               <a:buNone/>
             </a:pPr>
             <a:r>
-              <a:rPr b="0" lang="ru-RU" sz="1400" spc="-1" strike="noStrike">
+              <a:rPr b="0" lang="en-US" sz="1400" spc="-1" strike="noStrike">
                 <a:latin typeface="Times New Roman"/>
               </a:rPr>
-              <a:t>&lt;дата/время&gt;</a:t>
-            </a:r>
-            <a:endParaRPr b="0" lang="ru-RU" sz="1400" spc="-1" strike="noStrike">
+              <a:t>&lt;date/time&gt;</a:t>
+            </a:r>
+            <a:endParaRPr b="0" lang="en-US" sz="1400" spc="-1" strike="noStrike">
               <a:latin typeface="Times New Roman"/>
             </a:endParaRPr>
           </a:p>
@@ -244,19 +244,19 @@
           </a:bodyPr>
           <a:lstStyle>
             <a:lvl1pPr>
-              <a:defRPr b="0" lang="ru-RU" sz="1400" spc="-1" strike="noStrike">
+              <a:defRPr b="0" lang="en-US" sz="1400" spc="-1" strike="noStrike">
                 <a:latin typeface="Times New Roman"/>
               </a:defRPr>
             </a:lvl1pPr>
           </a:lstStyle>
           <a:p>
             <a:r>
-              <a:rPr b="0" lang="ru-RU" sz="1400" spc="-1" strike="noStrike">
+              <a:rPr b="0" lang="en-US" sz="1400" spc="-1" strike="noStrike">
                 <a:latin typeface="Times New Roman"/>
               </a:rPr>
-              <a:t>&lt;нижний колонтитул&gt;</a:t>
-            </a:r>
-            <a:endParaRPr b="0" lang="ru-RU" sz="1400" spc="-1" strike="noStrike">
+              <a:t>&lt;footer&gt;</a:t>
+            </a:r>
+            <a:endParaRPr b="0" lang="en-US" sz="1400" spc="-1" strike="noStrike">
               <a:latin typeface="Times New Roman"/>
             </a:endParaRPr>
           </a:p>
@@ -292,7 +292,7 @@
           <a:lstStyle>
             <a:lvl1pPr algn="r">
               <a:buNone/>
-              <a:defRPr b="0" lang="ru-RU" sz="1400" spc="-1" strike="noStrike">
+              <a:defRPr b="0" lang="en-US" sz="1400" spc="-1" strike="noStrike">
                 <a:latin typeface="Times New Roman"/>
               </a:defRPr>
             </a:lvl1pPr>
@@ -301,13 +301,13 @@
             <a:pPr algn="r">
               <a:buNone/>
             </a:pPr>
-            <a:fld id="{216054BE-ADE1-4937-AC27-A1693DF357BF}" type="slidenum">
-              <a:rPr b="0" lang="ru-RU" sz="1400" spc="-1" strike="noStrike">
+            <a:fld id="{FF82C14C-F343-41E0-A6DF-B03001EA62BF}" type="slidenum">
+              <a:rPr b="0" lang="en-US" sz="1400" spc="-1" strike="noStrike">
                 <a:latin typeface="Times New Roman"/>
               </a:rPr>
-              <a:t>&lt;номер&gt;</a:t>
+              <a:t>&lt;number&gt;</a:t>
             </a:fld>
-            <a:endParaRPr b="0" lang="ru-RU" sz="1400" spc="-1" strike="noStrike">
+            <a:endParaRPr b="0" lang="en-US" sz="1400" spc="-1" strike="noStrike">
               <a:latin typeface="Times New Roman"/>
             </a:endParaRPr>
           </a:p>
@@ -338,7 +338,7 @@
       </p:grpSpPr>
       <p:sp>
         <p:nvSpPr>
-          <p:cNvPr id="149" name="PlaceHolder 1"/>
+          <p:cNvPr id="148" name="PlaceHolder 1"/>
           <p:cNvSpPr>
             <a:spLocks noGrp="1"/>
           </p:cNvSpPr>
@@ -349,19 +349,19 @@
         <p:spPr>
           <a:xfrm>
             <a:off x="685800" y="1143000"/>
-            <a:ext cx="5485680" cy="3085560"/>
-          </a:xfrm>
-          <a:prstGeom prst="rect">
-            <a:avLst/>
-          </a:prstGeom>
-          <a:ln w="0">
-            <a:noFill/>
-          </a:ln>
-        </p:spPr>
-      </p:sp>
-      <p:sp>
-        <p:nvSpPr>
-          <p:cNvPr id="150" name="PlaceHolder 2"/>
+            <a:ext cx="5485320" cy="3085200"/>
+          </a:xfrm>
+          <a:prstGeom prst="rect">
+            <a:avLst/>
+          </a:prstGeom>
+          <a:ln w="0">
+            <a:noFill/>
+          </a:ln>
+        </p:spPr>
+      </p:sp>
+      <p:sp>
+        <p:nvSpPr>
+          <p:cNvPr id="149" name="PlaceHolder 2"/>
           <p:cNvSpPr>
             <a:spLocks noGrp="1"/>
           </p:cNvSpPr>
@@ -372,7 +372,7 @@
         <p:spPr>
           <a:xfrm>
             <a:off x="685800" y="4400640"/>
-            <a:ext cx="5485680" cy="3599640"/>
+            <a:ext cx="5485320" cy="3599280"/>
           </a:xfrm>
           <a:prstGeom prst="rect">
             <a:avLst/>
@@ -387,15 +387,15 @@
             <a:noAutofit/>
           </a:bodyPr>
           <a:p>
-            <a:endParaRPr b="0" lang="ru-RU" sz="2000" spc="-1" strike="noStrike">
-              <a:latin typeface="Arial"/>
-            </a:endParaRPr>
-          </a:p>
-        </p:txBody>
-      </p:sp>
-      <p:sp>
-        <p:nvSpPr>
-          <p:cNvPr id="151" name="PlaceHolder 3"/>
+            <a:endParaRPr b="0" lang="en-US" sz="2000" spc="-1" strike="noStrike">
+              <a:latin typeface="Arial"/>
+            </a:endParaRPr>
+          </a:p>
+        </p:txBody>
+      </p:sp>
+      <p:sp>
+        <p:nvSpPr>
+          <p:cNvPr id="150" name="PlaceHolder 3"/>
           <p:cNvSpPr>
             <a:spLocks noGrp="1"/>
           </p:cNvSpPr>
@@ -406,7 +406,7 @@
         <p:spPr>
           <a:xfrm>
             <a:off x="3884760" y="8685360"/>
-            <a:ext cx="2971080" cy="457920"/>
+            <a:ext cx="2970720" cy="457560"/>
           </a:xfrm>
           <a:prstGeom prst="rect">
             <a:avLst/>
@@ -438,13 +438,13 @@
               </a:lnSpc>
               <a:buNone/>
             </a:pPr>
-            <a:fld id="{6007317B-A333-4A8B-B2ED-006841765C85}" type="slidenum">
+            <a:fld id="{FFC40417-2812-44C8-B4C5-93861D77EBC6}" type="slidenum">
               <a:rPr b="0" lang="ru-RU" sz="1200" spc="-1" strike="noStrike">
                 <a:latin typeface="Times New Roman"/>
               </a:rPr>
-              <a:t>&lt;номер&gt;</a:t>
+              <a:t>&lt;number&gt;</a:t>
             </a:fld>
-            <a:endParaRPr b="0" lang="ru-RU" sz="1200" spc="-1" strike="noStrike">
+            <a:endParaRPr b="0" lang="en-US" sz="1200" spc="-1" strike="noStrike">
               <a:latin typeface="Times New Roman"/>
             </a:endParaRPr>
           </a:p>
@@ -474,7 +474,7 @@
       </p:grpSpPr>
       <p:sp>
         <p:nvSpPr>
-          <p:cNvPr id="152" name="PlaceHolder 1"/>
+          <p:cNvPr id="151" name="PlaceHolder 1"/>
           <p:cNvSpPr>
             <a:spLocks noGrp="1"/>
           </p:cNvSpPr>
@@ -485,19 +485,19 @@
         <p:spPr>
           <a:xfrm>
             <a:off x="685800" y="1143000"/>
-            <a:ext cx="5485680" cy="3085560"/>
-          </a:xfrm>
-          <a:prstGeom prst="rect">
-            <a:avLst/>
-          </a:prstGeom>
-          <a:ln w="0">
-            <a:noFill/>
-          </a:ln>
-        </p:spPr>
-      </p:sp>
-      <p:sp>
-        <p:nvSpPr>
-          <p:cNvPr id="153" name="PlaceHolder 2"/>
+            <a:ext cx="5485320" cy="3085200"/>
+          </a:xfrm>
+          <a:prstGeom prst="rect">
+            <a:avLst/>
+          </a:prstGeom>
+          <a:ln w="0">
+            <a:noFill/>
+          </a:ln>
+        </p:spPr>
+      </p:sp>
+      <p:sp>
+        <p:nvSpPr>
+          <p:cNvPr id="152" name="PlaceHolder 2"/>
           <p:cNvSpPr>
             <a:spLocks noGrp="1"/>
           </p:cNvSpPr>
@@ -508,7 +508,7 @@
         <p:spPr>
           <a:xfrm>
             <a:off x="685800" y="4400640"/>
-            <a:ext cx="5485680" cy="3599640"/>
+            <a:ext cx="5485320" cy="3599280"/>
           </a:xfrm>
           <a:prstGeom prst="rect">
             <a:avLst/>
@@ -523,15 +523,15 @@
             <a:noAutofit/>
           </a:bodyPr>
           <a:p>
-            <a:endParaRPr b="0" lang="ru-RU" sz="2000" spc="-1" strike="noStrike">
-              <a:latin typeface="Arial"/>
-            </a:endParaRPr>
-          </a:p>
-        </p:txBody>
-      </p:sp>
-      <p:sp>
-        <p:nvSpPr>
-          <p:cNvPr id="154" name="PlaceHolder 3"/>
+            <a:endParaRPr b="0" lang="en-US" sz="2000" spc="-1" strike="noStrike">
+              <a:latin typeface="Arial"/>
+            </a:endParaRPr>
+          </a:p>
+        </p:txBody>
+      </p:sp>
+      <p:sp>
+        <p:nvSpPr>
+          <p:cNvPr id="153" name="PlaceHolder 3"/>
           <p:cNvSpPr>
             <a:spLocks noGrp="1"/>
           </p:cNvSpPr>
@@ -542,7 +542,7 @@
         <p:spPr>
           <a:xfrm>
             <a:off x="3884760" y="8685360"/>
-            <a:ext cx="2971080" cy="457920"/>
+            <a:ext cx="2970720" cy="457560"/>
           </a:xfrm>
           <a:prstGeom prst="rect">
             <a:avLst/>
@@ -574,13 +574,13 @@
               </a:lnSpc>
               <a:buNone/>
             </a:pPr>
-            <a:fld id="{B9A3488C-BF2A-426E-AD5E-E7C1073F0C51}" type="slidenum">
+            <a:fld id="{BCD076B6-35EB-4721-863B-9F48332FA975}" type="slidenum">
               <a:rPr b="0" lang="ru-RU" sz="1200" spc="-1" strike="noStrike">
                 <a:latin typeface="Times New Roman"/>
               </a:rPr>
-              <a:t>&lt;номер&gt;</a:t>
+              <a:t>&lt;number&gt;</a:t>
             </a:fld>
-            <a:endParaRPr b="0" lang="ru-RU" sz="1200" spc="-1" strike="noStrike">
+            <a:endParaRPr b="0" lang="en-US" sz="1200" spc="-1" strike="noStrike">
               <a:latin typeface="Times New Roman"/>
             </a:endParaRPr>
           </a:p>
@@ -610,7 +610,7 @@
       </p:grpSpPr>
       <p:sp>
         <p:nvSpPr>
-          <p:cNvPr id="155" name="PlaceHolder 1"/>
+          <p:cNvPr id="154" name="PlaceHolder 1"/>
           <p:cNvSpPr>
             <a:spLocks noGrp="1"/>
           </p:cNvSpPr>
@@ -621,19 +621,19 @@
         <p:spPr>
           <a:xfrm>
             <a:off x="685800" y="1143000"/>
-            <a:ext cx="5485680" cy="3085560"/>
-          </a:xfrm>
-          <a:prstGeom prst="rect">
-            <a:avLst/>
-          </a:prstGeom>
-          <a:ln w="0">
-            <a:noFill/>
-          </a:ln>
-        </p:spPr>
-      </p:sp>
-      <p:sp>
-        <p:nvSpPr>
-          <p:cNvPr id="156" name="PlaceHolder 2"/>
+            <a:ext cx="5485320" cy="3085200"/>
+          </a:xfrm>
+          <a:prstGeom prst="rect">
+            <a:avLst/>
+          </a:prstGeom>
+          <a:ln w="0">
+            <a:noFill/>
+          </a:ln>
+        </p:spPr>
+      </p:sp>
+      <p:sp>
+        <p:nvSpPr>
+          <p:cNvPr id="155" name="PlaceHolder 2"/>
           <p:cNvSpPr>
             <a:spLocks noGrp="1"/>
           </p:cNvSpPr>
@@ -644,7 +644,7 @@
         <p:spPr>
           <a:xfrm>
             <a:off x="685800" y="4400640"/>
-            <a:ext cx="5485680" cy="3599640"/>
+            <a:ext cx="5485320" cy="3599280"/>
           </a:xfrm>
           <a:prstGeom prst="rect">
             <a:avLst/>
@@ -659,15 +659,15 @@
             <a:noAutofit/>
           </a:bodyPr>
           <a:p>
-            <a:endParaRPr b="0" lang="ru-RU" sz="2000" spc="-1" strike="noStrike">
-              <a:latin typeface="Arial"/>
-            </a:endParaRPr>
-          </a:p>
-        </p:txBody>
-      </p:sp>
-      <p:sp>
-        <p:nvSpPr>
-          <p:cNvPr id="157" name="PlaceHolder 3"/>
+            <a:endParaRPr b="0" lang="en-US" sz="2000" spc="-1" strike="noStrike">
+              <a:latin typeface="Arial"/>
+            </a:endParaRPr>
+          </a:p>
+        </p:txBody>
+      </p:sp>
+      <p:sp>
+        <p:nvSpPr>
+          <p:cNvPr id="156" name="PlaceHolder 3"/>
           <p:cNvSpPr>
             <a:spLocks noGrp="1"/>
           </p:cNvSpPr>
@@ -678,7 +678,7 @@
         <p:spPr>
           <a:xfrm>
             <a:off x="3884760" y="8685360"/>
-            <a:ext cx="2971080" cy="457920"/>
+            <a:ext cx="2970720" cy="457560"/>
           </a:xfrm>
           <a:prstGeom prst="rect">
             <a:avLst/>
@@ -710,13 +710,13 @@
               </a:lnSpc>
               <a:buNone/>
             </a:pPr>
-            <a:fld id="{904092EE-D1BC-403D-A6E4-B13BC7E8C6C3}" type="slidenum">
+            <a:fld id="{8A9B1256-77A6-4936-8A7C-3691F69B4178}" type="slidenum">
               <a:rPr b="0" lang="ru-RU" sz="1200" spc="-1" strike="noStrike">
                 <a:latin typeface="Times New Roman"/>
               </a:rPr>
-              <a:t>&lt;номер&gt;</a:t>
+              <a:t>&lt;number&gt;</a:t>
             </a:fld>
-            <a:endParaRPr b="0" lang="ru-RU" sz="1200" spc="-1" strike="noStrike">
+            <a:endParaRPr b="0" lang="en-US" sz="1200" spc="-1" strike="noStrike">
               <a:latin typeface="Times New Roman"/>
             </a:endParaRPr>
           </a:p>
@@ -778,7 +778,7 @@
         <p:txBody>
           <a:bodyPr/>
           <a:p>
-            <a:fld id="{F25766A0-E3F2-4270-ABEB-68F975E92D09}" type="slidenum">
+            <a:fld id="{AD8ABF2F-58BC-437E-9C5A-4DDC3A366414}" type="slidenum">
               <a:t>&lt;#&gt;</a:t>
             </a:fld>
           </a:p>
@@ -799,7 +799,7 @@
           <a:bodyPr/>
           <a:p>
             <a:r>
-              <a:rPr lang="ru-RU"/>
+              <a:rPr lang="en-US"/>
               <a:t/>
             </a:r>
           </a:p>
@@ -840,7 +840,7 @@
         <p:spPr>
           <a:xfrm>
             <a:off x="1143000" y="841680"/>
-            <a:ext cx="6857280" cy="1789920"/>
+            <a:ext cx="6856920" cy="1789560"/>
           </a:xfrm>
           <a:prstGeom prst="rect">
             <a:avLst/>
@@ -858,7 +858,7 @@
             <a:pPr algn="ctr">
               <a:buNone/>
             </a:pPr>
-            <a:endParaRPr b="0" lang="ru-RU" sz="4400" spc="-1" strike="noStrike">
+            <a:endParaRPr b="0" lang="en-US" sz="4400" spc="-1" strike="noStrike">
               <a:latin typeface="Arial"/>
             </a:endParaRPr>
           </a:p>
@@ -877,7 +877,7 @@
         <p:spPr>
           <a:xfrm>
             <a:off x="457200" y="1203480"/>
-            <a:ext cx="8229240" cy="1422720"/>
+            <a:ext cx="8228880" cy="1422360"/>
           </a:xfrm>
           <a:prstGeom prst="rect">
             <a:avLst/>
@@ -892,7 +892,7 @@
             <a:normAutofit/>
           </a:bodyPr>
           <a:p>
-            <a:endParaRPr b="0" lang="ru-RU" sz="3200" spc="-1" strike="noStrike">
+            <a:endParaRPr b="0" lang="en-US" sz="3200" spc="-1" strike="noStrike">
               <a:latin typeface="Arial"/>
             </a:endParaRPr>
           </a:p>
@@ -910,8 +910,8 @@
         </p:nvSpPr>
         <p:spPr>
           <a:xfrm>
-            <a:off x="457200" y="2761920"/>
-            <a:ext cx="8229240" cy="1422720"/>
+            <a:off x="457200" y="2761200"/>
+            <a:ext cx="8228880" cy="1422360"/>
           </a:xfrm>
           <a:prstGeom prst="rect">
             <a:avLst/>
@@ -926,7 +926,7 @@
             <a:normAutofit/>
           </a:bodyPr>
           <a:p>
-            <a:endParaRPr b="0" lang="ru-RU" sz="3200" spc="-1" strike="noStrike">
+            <a:endParaRPr b="0" lang="en-US" sz="3200" spc="-1" strike="noStrike">
               <a:latin typeface="Arial"/>
             </a:endParaRPr>
           </a:p>
@@ -966,7 +966,7 @@
         <p:txBody>
           <a:bodyPr/>
           <a:p>
-            <a:fld id="{40B269A6-8885-48E9-8437-1628B48E2072}" type="slidenum">
+            <a:fld id="{024F2909-A39B-4F4A-BEE2-DFEF14CF0DC6}" type="slidenum">
               <a:t>&lt;#&gt;</a:t>
             </a:fld>
           </a:p>
@@ -987,7 +987,7 @@
           <a:bodyPr/>
           <a:p>
             <a:r>
-              <a:rPr lang="ru-RU"/>
+              <a:rPr lang="en-US"/>
               <a:t/>
             </a:r>
           </a:p>
@@ -1028,7 +1028,7 @@
         <p:spPr>
           <a:xfrm>
             <a:off x="1143000" y="841680"/>
-            <a:ext cx="6857280" cy="1789920"/>
+            <a:ext cx="6856920" cy="1789560"/>
           </a:xfrm>
           <a:prstGeom prst="rect">
             <a:avLst/>
@@ -1046,7 +1046,7 @@
             <a:pPr algn="ctr">
               <a:buNone/>
             </a:pPr>
-            <a:endParaRPr b="0" lang="ru-RU" sz="4400" spc="-1" strike="noStrike">
+            <a:endParaRPr b="0" lang="en-US" sz="4400" spc="-1" strike="noStrike">
               <a:latin typeface="Arial"/>
             </a:endParaRPr>
           </a:p>
@@ -1065,7 +1065,7 @@
         <p:spPr>
           <a:xfrm>
             <a:off x="457200" y="1203480"/>
-            <a:ext cx="4015800" cy="1422720"/>
+            <a:ext cx="4015440" cy="1422360"/>
           </a:xfrm>
           <a:prstGeom prst="rect">
             <a:avLst/>
@@ -1080,7 +1080,7 @@
             <a:normAutofit/>
           </a:bodyPr>
           <a:p>
-            <a:endParaRPr b="0" lang="ru-RU" sz="3200" spc="-1" strike="noStrike">
+            <a:endParaRPr b="0" lang="en-US" sz="3200" spc="-1" strike="noStrike">
               <a:latin typeface="Arial"/>
             </a:endParaRPr>
           </a:p>
@@ -1098,8 +1098,8 @@
         </p:nvSpPr>
         <p:spPr>
           <a:xfrm>
-            <a:off x="4674240" y="1203480"/>
-            <a:ext cx="4015800" cy="1422720"/>
+            <a:off x="4673880" y="1203480"/>
+            <a:ext cx="4015440" cy="1422360"/>
           </a:xfrm>
           <a:prstGeom prst="rect">
             <a:avLst/>
@@ -1114,7 +1114,7 @@
             <a:normAutofit/>
           </a:bodyPr>
           <a:p>
-            <a:endParaRPr b="0" lang="ru-RU" sz="3200" spc="-1" strike="noStrike">
+            <a:endParaRPr b="0" lang="en-US" sz="3200" spc="-1" strike="noStrike">
               <a:latin typeface="Arial"/>
             </a:endParaRPr>
           </a:p>
@@ -1132,8 +1132,8 @@
         </p:nvSpPr>
         <p:spPr>
           <a:xfrm>
-            <a:off x="457200" y="2761920"/>
-            <a:ext cx="4015800" cy="1422720"/>
+            <a:off x="457200" y="2761200"/>
+            <a:ext cx="4015440" cy="1422360"/>
           </a:xfrm>
           <a:prstGeom prst="rect">
             <a:avLst/>
@@ -1148,7 +1148,7 @@
             <a:normAutofit/>
           </a:bodyPr>
           <a:p>
-            <a:endParaRPr b="0" lang="ru-RU" sz="3200" spc="-1" strike="noStrike">
+            <a:endParaRPr b="0" lang="en-US" sz="3200" spc="-1" strike="noStrike">
               <a:latin typeface="Arial"/>
             </a:endParaRPr>
           </a:p>
@@ -1166,8 +1166,8 @@
         </p:nvSpPr>
         <p:spPr>
           <a:xfrm>
-            <a:off x="4674240" y="2761920"/>
-            <a:ext cx="4015800" cy="1422720"/>
+            <a:off x="4673880" y="2761200"/>
+            <a:ext cx="4015440" cy="1422360"/>
           </a:xfrm>
           <a:prstGeom prst="rect">
             <a:avLst/>
@@ -1182,7 +1182,7 @@
             <a:normAutofit/>
           </a:bodyPr>
           <a:p>
-            <a:endParaRPr b="0" lang="ru-RU" sz="3200" spc="-1" strike="noStrike">
+            <a:endParaRPr b="0" lang="en-US" sz="3200" spc="-1" strike="noStrike">
               <a:latin typeface="Arial"/>
             </a:endParaRPr>
           </a:p>
@@ -1222,7 +1222,7 @@
         <p:txBody>
           <a:bodyPr/>
           <a:p>
-            <a:fld id="{CB59782E-07B0-4E4A-92A9-C198D3DC20D2}" type="slidenum">
+            <a:fld id="{8C79C1F7-9AEA-4512-AEBE-063E43825E05}" type="slidenum">
               <a:t>&lt;#&gt;</a:t>
             </a:fld>
           </a:p>
@@ -1243,7 +1243,7 @@
           <a:bodyPr/>
           <a:p>
             <a:r>
-              <a:rPr lang="ru-RU"/>
+              <a:rPr lang="en-US"/>
               <a:t/>
             </a:r>
           </a:p>
@@ -1284,7 +1284,7 @@
         <p:spPr>
           <a:xfrm>
             <a:off x="1143000" y="841680"/>
-            <a:ext cx="6857280" cy="1789920"/>
+            <a:ext cx="6856920" cy="1789560"/>
           </a:xfrm>
           <a:prstGeom prst="rect">
             <a:avLst/>
@@ -1302,7 +1302,7 @@
             <a:pPr algn="ctr">
               <a:buNone/>
             </a:pPr>
-            <a:endParaRPr b="0" lang="ru-RU" sz="4400" spc="-1" strike="noStrike">
+            <a:endParaRPr b="0" lang="en-US" sz="4400" spc="-1" strike="noStrike">
               <a:latin typeface="Arial"/>
             </a:endParaRPr>
           </a:p>
@@ -1321,7 +1321,7 @@
         <p:spPr>
           <a:xfrm>
             <a:off x="457200" y="1203480"/>
-            <a:ext cx="2649600" cy="1422720"/>
+            <a:ext cx="2649600" cy="1422360"/>
           </a:xfrm>
           <a:prstGeom prst="rect">
             <a:avLst/>
@@ -1333,10 +1333,10 @@
         </p:spPr>
         <p:txBody>
           <a:bodyPr lIns="0" rIns="0" tIns="0" bIns="0" anchor="t">
-            <a:normAutofit fontScale="73000"/>
-          </a:bodyPr>
-          <a:p>
-            <a:endParaRPr b="0" lang="ru-RU" sz="3200" spc="-1" strike="noStrike">
+            <a:normAutofit/>
+          </a:bodyPr>
+          <a:p>
+            <a:endParaRPr b="0" lang="en-US" sz="3200" spc="-1" strike="noStrike">
               <a:latin typeface="Arial"/>
             </a:endParaRPr>
           </a:p>
@@ -1355,7 +1355,7 @@
         <p:spPr>
           <a:xfrm>
             <a:off x="3239640" y="1203480"/>
-            <a:ext cx="2649600" cy="1422720"/>
+            <a:ext cx="2649600" cy="1422360"/>
           </a:xfrm>
           <a:prstGeom prst="rect">
             <a:avLst/>
@@ -1367,10 +1367,10 @@
         </p:spPr>
         <p:txBody>
           <a:bodyPr lIns="0" rIns="0" tIns="0" bIns="0" anchor="t">
-            <a:normAutofit fontScale="73000"/>
-          </a:bodyPr>
-          <a:p>
-            <a:endParaRPr b="0" lang="ru-RU" sz="3200" spc="-1" strike="noStrike">
+            <a:normAutofit/>
+          </a:bodyPr>
+          <a:p>
+            <a:endParaRPr b="0" lang="en-US" sz="3200" spc="-1" strike="noStrike">
               <a:latin typeface="Arial"/>
             </a:endParaRPr>
           </a:p>
@@ -1389,7 +1389,7 @@
         <p:spPr>
           <a:xfrm>
             <a:off x="6022080" y="1203480"/>
-            <a:ext cx="2649600" cy="1422720"/>
+            <a:ext cx="2649600" cy="1422360"/>
           </a:xfrm>
           <a:prstGeom prst="rect">
             <a:avLst/>
@@ -1401,10 +1401,10 @@
         </p:spPr>
         <p:txBody>
           <a:bodyPr lIns="0" rIns="0" tIns="0" bIns="0" anchor="t">
-            <a:normAutofit fontScale="73000"/>
-          </a:bodyPr>
-          <a:p>
-            <a:endParaRPr b="0" lang="ru-RU" sz="3200" spc="-1" strike="noStrike">
+            <a:normAutofit/>
+          </a:bodyPr>
+          <a:p>
+            <a:endParaRPr b="0" lang="en-US" sz="3200" spc="-1" strike="noStrike">
               <a:latin typeface="Arial"/>
             </a:endParaRPr>
           </a:p>
@@ -1422,8 +1422,8 @@
         </p:nvSpPr>
         <p:spPr>
           <a:xfrm>
-            <a:off x="457200" y="2761920"/>
-            <a:ext cx="2649600" cy="1422720"/>
+            <a:off x="457200" y="2761200"/>
+            <a:ext cx="2649600" cy="1422360"/>
           </a:xfrm>
           <a:prstGeom prst="rect">
             <a:avLst/>
@@ -1435,10 +1435,10 @@
         </p:spPr>
         <p:txBody>
           <a:bodyPr lIns="0" rIns="0" tIns="0" bIns="0" anchor="t">
-            <a:normAutofit fontScale="73000"/>
-          </a:bodyPr>
-          <a:p>
-            <a:endParaRPr b="0" lang="ru-RU" sz="3200" spc="-1" strike="noStrike">
+            <a:normAutofit/>
+          </a:bodyPr>
+          <a:p>
+            <a:endParaRPr b="0" lang="en-US" sz="3200" spc="-1" strike="noStrike">
               <a:latin typeface="Arial"/>
             </a:endParaRPr>
           </a:p>
@@ -1456,8 +1456,8 @@
         </p:nvSpPr>
         <p:spPr>
           <a:xfrm>
-            <a:off x="3239640" y="2761920"/>
-            <a:ext cx="2649600" cy="1422720"/>
+            <a:off x="3239640" y="2761200"/>
+            <a:ext cx="2649600" cy="1422360"/>
           </a:xfrm>
           <a:prstGeom prst="rect">
             <a:avLst/>
@@ -1469,10 +1469,10 @@
         </p:spPr>
         <p:txBody>
           <a:bodyPr lIns="0" rIns="0" tIns="0" bIns="0" anchor="t">
-            <a:normAutofit fontScale="73000"/>
-          </a:bodyPr>
-          <a:p>
-            <a:endParaRPr b="0" lang="ru-RU" sz="3200" spc="-1" strike="noStrike">
+            <a:normAutofit/>
+          </a:bodyPr>
+          <a:p>
+            <a:endParaRPr b="0" lang="en-US" sz="3200" spc="-1" strike="noStrike">
               <a:latin typeface="Arial"/>
             </a:endParaRPr>
           </a:p>
@@ -1490,8 +1490,8 @@
         </p:nvSpPr>
         <p:spPr>
           <a:xfrm>
-            <a:off x="6022080" y="2761920"/>
-            <a:ext cx="2649600" cy="1422720"/>
+            <a:off x="6022080" y="2761200"/>
+            <a:ext cx="2649600" cy="1422360"/>
           </a:xfrm>
           <a:prstGeom prst="rect">
             <a:avLst/>
@@ -1503,10 +1503,10 @@
         </p:spPr>
         <p:txBody>
           <a:bodyPr lIns="0" rIns="0" tIns="0" bIns="0" anchor="t">
-            <a:normAutofit fontScale="73000"/>
-          </a:bodyPr>
-          <a:p>
-            <a:endParaRPr b="0" lang="ru-RU" sz="3200" spc="-1" strike="noStrike">
+            <a:normAutofit/>
+          </a:bodyPr>
+          <a:p>
+            <a:endParaRPr b="0" lang="en-US" sz="3200" spc="-1" strike="noStrike">
               <a:latin typeface="Arial"/>
             </a:endParaRPr>
           </a:p>
@@ -1546,7 +1546,7 @@
         <p:txBody>
           <a:bodyPr/>
           <a:p>
-            <a:fld id="{8B9B818B-BB55-4EBA-9B8F-6CDE2BE99F3C}" type="slidenum">
+            <a:fld id="{F0B1A8E6-858F-4619-BCEE-DE893F28A294}" type="slidenum">
               <a:t>&lt;#&gt;</a:t>
             </a:fld>
           </a:p>
@@ -1567,7 +1567,7 @@
           <a:bodyPr/>
           <a:p>
             <a:r>
-              <a:rPr lang="ru-RU"/>
+              <a:rPr lang="en-US"/>
               <a:t/>
             </a:r>
           </a:p>
@@ -1608,7 +1608,7 @@
         <p:spPr>
           <a:xfrm>
             <a:off x="1143000" y="841680"/>
-            <a:ext cx="6857280" cy="1789920"/>
+            <a:ext cx="6856920" cy="1789560"/>
           </a:xfrm>
           <a:prstGeom prst="rect">
             <a:avLst/>
@@ -1626,7 +1626,7 @@
             <a:pPr algn="ctr">
               <a:buNone/>
             </a:pPr>
-            <a:endParaRPr b="0" lang="ru-RU" sz="4400" spc="-1" strike="noStrike">
+            <a:endParaRPr b="0" lang="en-US" sz="4400" spc="-1" strike="noStrike">
               <a:latin typeface="Arial"/>
             </a:endParaRPr>
           </a:p>
@@ -1645,7 +1645,7 @@
         <p:spPr>
           <a:xfrm>
             <a:off x="457200" y="1203480"/>
-            <a:ext cx="8229240" cy="2982960"/>
+            <a:ext cx="8228880" cy="2982600"/>
           </a:xfrm>
           <a:prstGeom prst="rect">
             <a:avLst/>
@@ -1663,7 +1663,7 @@
             <a:pPr algn="ctr">
               <a:buNone/>
             </a:pPr>
-            <a:endParaRPr b="0" lang="ru-RU" sz="3200" spc="-1" strike="noStrike">
+            <a:endParaRPr b="0" lang="en-US" sz="3200" spc="-1" strike="noStrike">
               <a:latin typeface="Arial"/>
             </a:endParaRPr>
           </a:p>
@@ -1703,7 +1703,7 @@
         <p:txBody>
           <a:bodyPr/>
           <a:p>
-            <a:fld id="{FE5670A3-1DC5-48B8-8570-86878924ED99}" type="slidenum">
+            <a:fld id="{825F5CC7-0465-4AF3-B0A3-5948FD931FAE}" type="slidenum">
               <a:t>&lt;#&gt;</a:t>
             </a:fld>
           </a:p>
@@ -1724,7 +1724,7 @@
           <a:bodyPr/>
           <a:p>
             <a:r>
-              <a:rPr lang="ru-RU"/>
+              <a:rPr lang="en-US"/>
               <a:t/>
             </a:r>
           </a:p>
@@ -1765,7 +1765,7 @@
         <p:spPr>
           <a:xfrm>
             <a:off x="1143000" y="841680"/>
-            <a:ext cx="6857280" cy="1789920"/>
+            <a:ext cx="6856920" cy="1789560"/>
           </a:xfrm>
           <a:prstGeom prst="rect">
             <a:avLst/>
@@ -1783,7 +1783,7 @@
             <a:pPr algn="ctr">
               <a:buNone/>
             </a:pPr>
-            <a:endParaRPr b="0" lang="ru-RU" sz="4400" spc="-1" strike="noStrike">
+            <a:endParaRPr b="0" lang="en-US" sz="4400" spc="-1" strike="noStrike">
               <a:latin typeface="Arial"/>
             </a:endParaRPr>
           </a:p>
@@ -1802,7 +1802,7 @@
         <p:spPr>
           <a:xfrm>
             <a:off x="457200" y="1203480"/>
-            <a:ext cx="8229240" cy="2982960"/>
+            <a:ext cx="8228880" cy="2982600"/>
           </a:xfrm>
           <a:prstGeom prst="rect">
             <a:avLst/>
@@ -1817,7 +1817,7 @@
             <a:normAutofit/>
           </a:bodyPr>
           <a:p>
-            <a:endParaRPr b="0" lang="ru-RU" sz="3200" spc="-1" strike="noStrike">
+            <a:endParaRPr b="0" lang="en-US" sz="3200" spc="-1" strike="noStrike">
               <a:latin typeface="Arial"/>
             </a:endParaRPr>
           </a:p>
@@ -1857,7 +1857,7 @@
         <p:txBody>
           <a:bodyPr/>
           <a:p>
-            <a:fld id="{F619C975-A365-4BCE-BC17-75914D854806}" type="slidenum">
+            <a:fld id="{A2B45EE6-7443-46FA-8479-3EF595331EB1}" type="slidenum">
               <a:t>&lt;#&gt;</a:t>
             </a:fld>
           </a:p>
@@ -1878,7 +1878,7 @@
           <a:bodyPr/>
           <a:p>
             <a:r>
-              <a:rPr lang="ru-RU"/>
+              <a:rPr lang="en-US"/>
               <a:t/>
             </a:r>
           </a:p>
@@ -1919,7 +1919,7 @@
         <p:spPr>
           <a:xfrm>
             <a:off x="1143000" y="841680"/>
-            <a:ext cx="6857280" cy="1789920"/>
+            <a:ext cx="6856920" cy="1789560"/>
           </a:xfrm>
           <a:prstGeom prst="rect">
             <a:avLst/>
@@ -1937,7 +1937,7 @@
             <a:pPr algn="ctr">
               <a:buNone/>
             </a:pPr>
-            <a:endParaRPr b="0" lang="ru-RU" sz="4400" spc="-1" strike="noStrike">
+            <a:endParaRPr b="0" lang="en-US" sz="4400" spc="-1" strike="noStrike">
               <a:latin typeface="Arial"/>
             </a:endParaRPr>
           </a:p>
@@ -1956,7 +1956,7 @@
         <p:spPr>
           <a:xfrm>
             <a:off x="457200" y="1203480"/>
-            <a:ext cx="4015800" cy="2982960"/>
+            <a:ext cx="4015440" cy="2982600"/>
           </a:xfrm>
           <a:prstGeom prst="rect">
             <a:avLst/>
@@ -1971,7 +1971,7 @@
             <a:normAutofit/>
           </a:bodyPr>
           <a:p>
-            <a:endParaRPr b="0" lang="ru-RU" sz="3200" spc="-1" strike="noStrike">
+            <a:endParaRPr b="0" lang="en-US" sz="3200" spc="-1" strike="noStrike">
               <a:latin typeface="Arial"/>
             </a:endParaRPr>
           </a:p>
@@ -1989,8 +1989,8 @@
         </p:nvSpPr>
         <p:spPr>
           <a:xfrm>
-            <a:off x="4674240" y="1203480"/>
-            <a:ext cx="4015800" cy="2982960"/>
+            <a:off x="4673880" y="1203480"/>
+            <a:ext cx="4015440" cy="2982600"/>
           </a:xfrm>
           <a:prstGeom prst="rect">
             <a:avLst/>
@@ -2005,7 +2005,7 @@
             <a:normAutofit/>
           </a:bodyPr>
           <a:p>
-            <a:endParaRPr b="0" lang="ru-RU" sz="3200" spc="-1" strike="noStrike">
+            <a:endParaRPr b="0" lang="en-US" sz="3200" spc="-1" strike="noStrike">
               <a:latin typeface="Arial"/>
             </a:endParaRPr>
           </a:p>
@@ -2045,7 +2045,7 @@
         <p:txBody>
           <a:bodyPr/>
           <a:p>
-            <a:fld id="{A67092FB-4FD1-4A5E-9D68-545F14B3010E}" type="slidenum">
+            <a:fld id="{B344D82F-1D1D-44F5-A365-9F299E50E795}" type="slidenum">
               <a:t>&lt;#&gt;</a:t>
             </a:fld>
           </a:p>
@@ -2066,7 +2066,7 @@
           <a:bodyPr/>
           <a:p>
             <a:r>
-              <a:rPr lang="ru-RU"/>
+              <a:rPr lang="en-US"/>
               <a:t/>
             </a:r>
           </a:p>
@@ -2107,7 +2107,7 @@
         <p:spPr>
           <a:xfrm>
             <a:off x="1143000" y="841680"/>
-            <a:ext cx="6857280" cy="1789920"/>
+            <a:ext cx="6856920" cy="1789560"/>
           </a:xfrm>
           <a:prstGeom prst="rect">
             <a:avLst/>
@@ -2125,7 +2125,7 @@
             <a:pPr algn="ctr">
               <a:buNone/>
             </a:pPr>
-            <a:endParaRPr b="0" lang="ru-RU" sz="4400" spc="-1" strike="noStrike">
+            <a:endParaRPr b="0" lang="en-US" sz="4400" spc="-1" strike="noStrike">
               <a:latin typeface="Arial"/>
             </a:endParaRPr>
           </a:p>
@@ -2165,7 +2165,7 @@
         <p:txBody>
           <a:bodyPr/>
           <a:p>
-            <a:fld id="{551E7A1E-DA6C-48D8-8954-93408DDECA4F}" type="slidenum">
+            <a:fld id="{9965CA1D-B15C-4C4B-AD54-E187CA236297}" type="slidenum">
               <a:t>&lt;#&gt;</a:t>
             </a:fld>
           </a:p>
@@ -2186,7 +2186,7 @@
           <a:bodyPr/>
           <a:p>
             <a:r>
-              <a:rPr lang="ru-RU"/>
+              <a:rPr lang="en-US"/>
               <a:t/>
             </a:r>
           </a:p>
@@ -2227,7 +2227,7 @@
         <p:spPr>
           <a:xfrm>
             <a:off x="1143000" y="841680"/>
-            <a:ext cx="6857280" cy="8298360"/>
+            <a:ext cx="6856920" cy="8296560"/>
           </a:xfrm>
           <a:prstGeom prst="rect">
             <a:avLst/>
@@ -2245,7 +2245,7 @@
             <a:pPr algn="ctr">
               <a:buNone/>
             </a:pPr>
-            <a:endParaRPr b="0" lang="ru-RU" sz="3200" spc="-1" strike="noStrike">
+            <a:endParaRPr b="0" lang="en-US" sz="3200" spc="-1" strike="noStrike">
               <a:latin typeface="Arial"/>
             </a:endParaRPr>
           </a:p>
@@ -2285,7 +2285,7 @@
         <p:txBody>
           <a:bodyPr/>
           <a:p>
-            <a:fld id="{9609927C-D09F-4ABA-80C0-FB9B9EFA5226}" type="slidenum">
+            <a:fld id="{F642D974-B5EA-4B42-8A2C-688EF2243064}" type="slidenum">
               <a:t>&lt;#&gt;</a:t>
             </a:fld>
           </a:p>
@@ -2306,7 +2306,7 @@
           <a:bodyPr/>
           <a:p>
             <a:r>
-              <a:rPr lang="ru-RU"/>
+              <a:rPr lang="en-US"/>
               <a:t/>
             </a:r>
           </a:p>
@@ -2347,7 +2347,7 @@
         <p:spPr>
           <a:xfrm>
             <a:off x="1143000" y="841680"/>
-            <a:ext cx="6857280" cy="1789920"/>
+            <a:ext cx="6856920" cy="1789560"/>
           </a:xfrm>
           <a:prstGeom prst="rect">
             <a:avLst/>
@@ -2365,7 +2365,7 @@
             <a:pPr algn="ctr">
               <a:buNone/>
             </a:pPr>
-            <a:endParaRPr b="0" lang="ru-RU" sz="4400" spc="-1" strike="noStrike">
+            <a:endParaRPr b="0" lang="en-US" sz="4400" spc="-1" strike="noStrike">
               <a:latin typeface="Arial"/>
             </a:endParaRPr>
           </a:p>
@@ -2384,7 +2384,7 @@
         <p:spPr>
           <a:xfrm>
             <a:off x="457200" y="1203480"/>
-            <a:ext cx="4015800" cy="1422720"/>
+            <a:ext cx="4015440" cy="1422360"/>
           </a:xfrm>
           <a:prstGeom prst="rect">
             <a:avLst/>
@@ -2399,7 +2399,7 @@
             <a:normAutofit/>
           </a:bodyPr>
           <a:p>
-            <a:endParaRPr b="0" lang="ru-RU" sz="3200" spc="-1" strike="noStrike">
+            <a:endParaRPr b="0" lang="en-US" sz="3200" spc="-1" strike="noStrike">
               <a:latin typeface="Arial"/>
             </a:endParaRPr>
           </a:p>
@@ -2417,8 +2417,8 @@
         </p:nvSpPr>
         <p:spPr>
           <a:xfrm>
-            <a:off x="4674240" y="1203480"/>
-            <a:ext cx="4015800" cy="2982960"/>
+            <a:off x="4673880" y="1203480"/>
+            <a:ext cx="4015440" cy="2982600"/>
           </a:xfrm>
           <a:prstGeom prst="rect">
             <a:avLst/>
@@ -2433,7 +2433,7 @@
             <a:normAutofit/>
           </a:bodyPr>
           <a:p>
-            <a:endParaRPr b="0" lang="ru-RU" sz="3200" spc="-1" strike="noStrike">
+            <a:endParaRPr b="0" lang="en-US" sz="3200" spc="-1" strike="noStrike">
               <a:latin typeface="Arial"/>
             </a:endParaRPr>
           </a:p>
@@ -2451,8 +2451,8 @@
         </p:nvSpPr>
         <p:spPr>
           <a:xfrm>
-            <a:off x="457200" y="2761920"/>
-            <a:ext cx="4015800" cy="1422720"/>
+            <a:off x="457200" y="2761200"/>
+            <a:ext cx="4015440" cy="1422360"/>
           </a:xfrm>
           <a:prstGeom prst="rect">
             <a:avLst/>
@@ -2467,7 +2467,7 @@
             <a:normAutofit/>
           </a:bodyPr>
           <a:p>
-            <a:endParaRPr b="0" lang="ru-RU" sz="3200" spc="-1" strike="noStrike">
+            <a:endParaRPr b="0" lang="en-US" sz="3200" spc="-1" strike="noStrike">
               <a:latin typeface="Arial"/>
             </a:endParaRPr>
           </a:p>
@@ -2507,7 +2507,7 @@
         <p:txBody>
           <a:bodyPr/>
           <a:p>
-            <a:fld id="{46504D11-15A4-40CB-A209-91A3F0B329A1}" type="slidenum">
+            <a:fld id="{88EEC4E8-54C3-43F7-A312-6E0F4217553E}" type="slidenum">
               <a:t>&lt;#&gt;</a:t>
             </a:fld>
           </a:p>
@@ -2528,7 +2528,7 @@
           <a:bodyPr/>
           <a:p>
             <a:r>
-              <a:rPr lang="ru-RU"/>
+              <a:rPr lang="en-US"/>
               <a:t/>
             </a:r>
           </a:p>
@@ -2569,7 +2569,7 @@
         <p:spPr>
           <a:xfrm>
             <a:off x="1143000" y="841680"/>
-            <a:ext cx="6857280" cy="1789920"/>
+            <a:ext cx="6856920" cy="1789560"/>
           </a:xfrm>
           <a:prstGeom prst="rect">
             <a:avLst/>
@@ -2587,7 +2587,7 @@
             <a:pPr algn="ctr">
               <a:buNone/>
             </a:pPr>
-            <a:endParaRPr b="0" lang="ru-RU" sz="4400" spc="-1" strike="noStrike">
+            <a:endParaRPr b="0" lang="en-US" sz="4400" spc="-1" strike="noStrike">
               <a:latin typeface="Arial"/>
             </a:endParaRPr>
           </a:p>
@@ -2606,7 +2606,7 @@
         <p:spPr>
           <a:xfrm>
             <a:off x="457200" y="1203480"/>
-            <a:ext cx="4015800" cy="2982960"/>
+            <a:ext cx="4015440" cy="2982600"/>
           </a:xfrm>
           <a:prstGeom prst="rect">
             <a:avLst/>
@@ -2621,7 +2621,7 @@
             <a:normAutofit/>
           </a:bodyPr>
           <a:p>
-            <a:endParaRPr b="0" lang="ru-RU" sz="3200" spc="-1" strike="noStrike">
+            <a:endParaRPr b="0" lang="en-US" sz="3200" spc="-1" strike="noStrike">
               <a:latin typeface="Arial"/>
             </a:endParaRPr>
           </a:p>
@@ -2639,8 +2639,8 @@
         </p:nvSpPr>
         <p:spPr>
           <a:xfrm>
-            <a:off x="4674240" y="1203480"/>
-            <a:ext cx="4015800" cy="1422720"/>
+            <a:off x="4673880" y="1203480"/>
+            <a:ext cx="4015440" cy="1422360"/>
           </a:xfrm>
           <a:prstGeom prst="rect">
             <a:avLst/>
@@ -2655,7 +2655,7 @@
             <a:normAutofit/>
           </a:bodyPr>
           <a:p>
-            <a:endParaRPr b="0" lang="ru-RU" sz="3200" spc="-1" strike="noStrike">
+            <a:endParaRPr b="0" lang="en-US" sz="3200" spc="-1" strike="noStrike">
               <a:latin typeface="Arial"/>
             </a:endParaRPr>
           </a:p>
@@ -2673,8 +2673,8 @@
         </p:nvSpPr>
         <p:spPr>
           <a:xfrm>
-            <a:off x="4674240" y="2761920"/>
-            <a:ext cx="4015800" cy="1422720"/>
+            <a:off x="4673880" y="2761200"/>
+            <a:ext cx="4015440" cy="1422360"/>
           </a:xfrm>
           <a:prstGeom prst="rect">
             <a:avLst/>
@@ -2689,7 +2689,7 @@
             <a:normAutofit/>
           </a:bodyPr>
           <a:p>
-            <a:endParaRPr b="0" lang="ru-RU" sz="3200" spc="-1" strike="noStrike">
+            <a:endParaRPr b="0" lang="en-US" sz="3200" spc="-1" strike="noStrike">
               <a:latin typeface="Arial"/>
             </a:endParaRPr>
           </a:p>
@@ -2729,7 +2729,7 @@
         <p:txBody>
           <a:bodyPr/>
           <a:p>
-            <a:fld id="{74F5C303-78F8-4247-AB4D-047B5A85FF41}" type="slidenum">
+            <a:fld id="{C7A1F262-5F07-48AF-8730-A1FC7D6226F3}" type="slidenum">
               <a:t>&lt;#&gt;</a:t>
             </a:fld>
           </a:p>
@@ -2750,7 +2750,7 @@
           <a:bodyPr/>
           <a:p>
             <a:r>
-              <a:rPr lang="ru-RU"/>
+              <a:rPr lang="en-US"/>
               <a:t/>
             </a:r>
           </a:p>
@@ -2791,7 +2791,7 @@
         <p:spPr>
           <a:xfrm>
             <a:off x="1143000" y="841680"/>
-            <a:ext cx="6857280" cy="1789920"/>
+            <a:ext cx="6856920" cy="1789560"/>
           </a:xfrm>
           <a:prstGeom prst="rect">
             <a:avLst/>
@@ -2809,7 +2809,7 @@
             <a:pPr algn="ctr">
               <a:buNone/>
             </a:pPr>
-            <a:endParaRPr b="0" lang="ru-RU" sz="4400" spc="-1" strike="noStrike">
+            <a:endParaRPr b="0" lang="en-US" sz="4400" spc="-1" strike="noStrike">
               <a:latin typeface="Arial"/>
             </a:endParaRPr>
           </a:p>
@@ -2828,7 +2828,7 @@
         <p:spPr>
           <a:xfrm>
             <a:off x="457200" y="1203480"/>
-            <a:ext cx="4015800" cy="1422720"/>
+            <a:ext cx="4015440" cy="1422360"/>
           </a:xfrm>
           <a:prstGeom prst="rect">
             <a:avLst/>
@@ -2843,7 +2843,7 @@
             <a:normAutofit/>
           </a:bodyPr>
           <a:p>
-            <a:endParaRPr b="0" lang="ru-RU" sz="3200" spc="-1" strike="noStrike">
+            <a:endParaRPr b="0" lang="en-US" sz="3200" spc="-1" strike="noStrike">
               <a:latin typeface="Arial"/>
             </a:endParaRPr>
           </a:p>
@@ -2861,8 +2861,8 @@
         </p:nvSpPr>
         <p:spPr>
           <a:xfrm>
-            <a:off x="4674240" y="1203480"/>
-            <a:ext cx="4015800" cy="1422720"/>
+            <a:off x="4673880" y="1203480"/>
+            <a:ext cx="4015440" cy="1422360"/>
           </a:xfrm>
           <a:prstGeom prst="rect">
             <a:avLst/>
@@ -2877,7 +2877,7 @@
             <a:normAutofit/>
           </a:bodyPr>
           <a:p>
-            <a:endParaRPr b="0" lang="ru-RU" sz="3200" spc="-1" strike="noStrike">
+            <a:endParaRPr b="0" lang="en-US" sz="3200" spc="-1" strike="noStrike">
               <a:latin typeface="Arial"/>
             </a:endParaRPr>
           </a:p>
@@ -2895,8 +2895,8 @@
         </p:nvSpPr>
         <p:spPr>
           <a:xfrm>
-            <a:off x="457200" y="2761920"/>
-            <a:ext cx="8229240" cy="1422720"/>
+            <a:off x="457200" y="2761200"/>
+            <a:ext cx="8228880" cy="1422360"/>
           </a:xfrm>
           <a:prstGeom prst="rect">
             <a:avLst/>
@@ -2911,7 +2911,7 @@
             <a:normAutofit/>
           </a:bodyPr>
           <a:p>
-            <a:endParaRPr b="0" lang="ru-RU" sz="3200" spc="-1" strike="noStrike">
+            <a:endParaRPr b="0" lang="en-US" sz="3200" spc="-1" strike="noStrike">
               <a:latin typeface="Arial"/>
             </a:endParaRPr>
           </a:p>
@@ -2951,7 +2951,7 @@
         <p:txBody>
           <a:bodyPr/>
           <a:p>
-            <a:fld id="{A0AFC6F3-D274-4E7B-B7C2-0203F015C69E}" type="slidenum">
+            <a:fld id="{5F610A7E-F7C3-47EA-9B84-30E780C60B6F}" type="slidenum">
               <a:t>&lt;#&gt;</a:t>
             </a:fld>
           </a:p>
@@ -2972,7 +2972,7 @@
           <a:bodyPr/>
           <a:p>
             <a:r>
-              <a:rPr lang="ru-RU"/>
+              <a:rPr lang="en-US"/>
               <a:t/>
             </a:r>
           </a:p>
@@ -3020,7 +3020,7 @@
         <p:spPr>
           <a:xfrm>
             <a:off x="1143000" y="841680"/>
-            <a:ext cx="6857280" cy="1789920"/>
+            <a:ext cx="6856920" cy="1789560"/>
           </a:xfrm>
           <a:prstGeom prst="rect">
             <a:avLst/>
@@ -3036,12 +3036,12 @@
           </a:bodyPr>
           <a:p>
             <a:r>
-              <a:rPr b="0" lang="ru-RU" sz="1800" spc="-1" strike="noStrike">
-                <a:latin typeface="Arial"/>
-              </a:rPr>
-              <a:t>Для правки текста заглавия щёлкните мышью</a:t>
-            </a:r>
-            <a:endParaRPr b="0" lang="ru-RU" sz="1800" spc="-1" strike="noStrike">
+              <a:rPr b="0" lang="en-US" sz="1800" spc="-1" strike="noStrike">
+                <a:latin typeface="Arial"/>
+              </a:rPr>
+              <a:t>Click to edit the title text format</a:t>
+            </a:r>
+            <a:endParaRPr b="0" lang="en-US" sz="1800" spc="-1" strike="noStrike">
               <a:latin typeface="Arial"/>
             </a:endParaRPr>
           </a:p>
@@ -3050,173 +3050,6 @@
       <p:sp>
         <p:nvSpPr>
           <p:cNvPr id="1" name="PlaceHolder 2"/>
-          <p:cNvSpPr>
-            <a:spLocks noGrp="1"/>
-          </p:cNvSpPr>
-          <p:nvPr>
-            <p:ph type="ftr" idx="1"/>
-          </p:nvPr>
-        </p:nvSpPr>
-        <p:spPr>
-          <a:xfrm>
-            <a:off x="3029040" y="4767120"/>
-            <a:ext cx="3085560" cy="273240"/>
-          </a:xfrm>
-          <a:prstGeom prst="rect">
-            <a:avLst/>
-          </a:prstGeom>
-          <a:noFill/>
-          <a:ln w="0">
-            <a:noFill/>
-          </a:ln>
-        </p:spPr>
-        <p:txBody>
-          <a:bodyPr lIns="90000" rIns="90000" tIns="45000" bIns="45000" anchor="ctr">
-            <a:noAutofit/>
-          </a:bodyPr>
-          <a:lstStyle>
-            <a:lvl1pPr algn="ctr">
-              <a:lnSpc>
-                <a:spcPct val="100000"/>
-              </a:lnSpc>
-              <a:buNone/>
-              <a:defRPr b="0" lang="en-US" sz="1400" spc="-1" strike="noStrike">
-                <a:latin typeface="Times New Roman"/>
-              </a:defRPr>
-            </a:lvl1pPr>
-          </a:lstStyle>
-          <a:p>
-            <a:pPr algn="ctr">
-              <a:lnSpc>
-                <a:spcPct val="100000"/>
-              </a:lnSpc>
-              <a:buNone/>
-            </a:pPr>
-            <a:r>
-              <a:rPr b="0" lang="en-US" sz="1400" spc="-1" strike="noStrike">
-                <a:latin typeface="Times New Roman"/>
-              </a:rPr>
-              <a:t>&lt;нижний колонтитул&gt;</a:t>
-            </a:r>
-            <a:endParaRPr b="0" lang="ru-RU" sz="1400" spc="-1" strike="noStrike">
-              <a:latin typeface="Times New Roman"/>
-            </a:endParaRPr>
-          </a:p>
-        </p:txBody>
-      </p:sp>
-      <p:sp>
-        <p:nvSpPr>
-          <p:cNvPr id="2" name="PlaceHolder 3"/>
-          <p:cNvSpPr>
-            <a:spLocks noGrp="1"/>
-          </p:cNvSpPr>
-          <p:nvPr>
-            <p:ph type="sldNum" idx="2"/>
-          </p:nvPr>
-        </p:nvSpPr>
-        <p:spPr>
-          <a:xfrm>
-            <a:off x="6458040" y="4767120"/>
-            <a:ext cx="2056680" cy="273240"/>
-          </a:xfrm>
-          <a:prstGeom prst="rect">
-            <a:avLst/>
-          </a:prstGeom>
-          <a:noFill/>
-          <a:ln w="0">
-            <a:noFill/>
-          </a:ln>
-        </p:spPr>
-        <p:txBody>
-          <a:bodyPr lIns="90000" rIns="90000" tIns="45000" bIns="45000" anchor="ctr">
-            <a:noAutofit/>
-          </a:bodyPr>
-          <a:lstStyle>
-            <a:lvl1pPr algn="r">
-              <a:lnSpc>
-                <a:spcPct val="100000"/>
-              </a:lnSpc>
-              <a:buNone/>
-              <a:defRPr b="0" lang="en-US" sz="900" spc="-1" strike="noStrike">
-                <a:solidFill>
-                  <a:srgbClr val="8b8b8b"/>
-                </a:solidFill>
-                <a:latin typeface="Calibri"/>
-              </a:defRPr>
-            </a:lvl1pPr>
-          </a:lstStyle>
-          <a:p>
-            <a:pPr algn="r">
-              <a:lnSpc>
-                <a:spcPct val="100000"/>
-              </a:lnSpc>
-              <a:buNone/>
-            </a:pPr>
-            <a:fld id="{7196A42A-D684-41F7-A35A-FE0D9B95C216}" type="slidenum">
-              <a:rPr b="0" lang="en-US" sz="900" spc="-1" strike="noStrike">
-                <a:solidFill>
-                  <a:srgbClr val="8b8b8b"/>
-                </a:solidFill>
-                <a:latin typeface="Calibri"/>
-              </a:rPr>
-              <a:t>&lt;номер&gt;</a:t>
-            </a:fld>
-            <a:endParaRPr b="0" lang="ru-RU" sz="900" spc="-1" strike="noStrike">
-              <a:latin typeface="Times New Roman"/>
-            </a:endParaRPr>
-          </a:p>
-        </p:txBody>
-      </p:sp>
-      <p:sp>
-        <p:nvSpPr>
-          <p:cNvPr id="3" name="PlaceHolder 4"/>
-          <p:cNvSpPr>
-            <a:spLocks noGrp="1"/>
-          </p:cNvSpPr>
-          <p:nvPr>
-            <p:ph type="dt" idx="3"/>
-          </p:nvPr>
-        </p:nvSpPr>
-        <p:spPr>
-          <a:xfrm>
-            <a:off x="628560" y="4767120"/>
-            <a:ext cx="2056680" cy="273240"/>
-          </a:xfrm>
-          <a:prstGeom prst="rect">
-            <a:avLst/>
-          </a:prstGeom>
-          <a:noFill/>
-          <a:ln w="0">
-            <a:noFill/>
-          </a:ln>
-        </p:spPr>
-        <p:txBody>
-          <a:bodyPr lIns="90000" rIns="90000" tIns="45000" bIns="45000" anchor="ctr">
-            <a:noAutofit/>
-          </a:bodyPr>
-          <a:lstStyle>
-            <a:lvl1pPr>
-              <a:defRPr b="0" lang="ru-RU" sz="1400" spc="-1" strike="noStrike">
-                <a:latin typeface="Times New Roman"/>
-              </a:defRPr>
-            </a:lvl1pPr>
-          </a:lstStyle>
-          <a:p>
-            <a:r>
-              <a:rPr b="0" lang="ru-RU" sz="1400" spc="-1" strike="noStrike">
-                <a:latin typeface="Times New Roman"/>
-              </a:rPr>
-              <a:t>&lt;дата/время&gt;</a:t>
-            </a:r>
-            <a:endParaRPr b="0" lang="ru-RU" sz="1400" spc="-1" strike="noStrike">
-              <a:latin typeface="Times New Roman"/>
-            </a:endParaRPr>
-          </a:p>
-        </p:txBody>
-      </p:sp>
-      <p:sp>
-        <p:nvSpPr>
-          <p:cNvPr id="4" name="PlaceHolder 5"/>
           <p:cNvSpPr>
             <a:spLocks noGrp="1"/>
           </p:cNvSpPr>
@@ -3227,7 +3060,7 @@
         <p:spPr>
           <a:xfrm>
             <a:off x="457200" y="1203480"/>
-            <a:ext cx="8229240" cy="2982960"/>
+            <a:ext cx="8228880" cy="2982600"/>
           </a:xfrm>
           <a:prstGeom prst="rect">
             <a:avLst/>
@@ -3254,12 +3087,12 @@
               <a:buChar char=""/>
             </a:pPr>
             <a:r>
-              <a:rPr b="0" lang="ru-RU" sz="3200" spc="-1" strike="noStrike">
-                <a:latin typeface="Arial"/>
-              </a:rPr>
-              <a:t>Для правки структуры щёлкните мышью</a:t>
-            </a:r>
-            <a:endParaRPr b="0" lang="ru-RU" sz="3200" spc="-1" strike="noStrike">
+              <a:rPr b="0" lang="en-US" sz="1800" spc="-1" strike="noStrike">
+                <a:latin typeface="Arial"/>
+              </a:rPr>
+              <a:t>Click to edit the outline text format</a:t>
+            </a:r>
+            <a:endParaRPr b="0" lang="en-US" sz="1800" spc="-1" strike="noStrike">
               <a:latin typeface="Arial"/>
             </a:endParaRPr>
           </a:p>
@@ -3276,12 +3109,12 @@
               <a:buChar char=""/>
             </a:pPr>
             <a:r>
-              <a:rPr b="0" lang="ru-RU" sz="2800" spc="-1" strike="noStrike">
-                <a:latin typeface="Arial"/>
-              </a:rPr>
-              <a:t>Второй уровень структуры</a:t>
-            </a:r>
-            <a:endParaRPr b="0" lang="ru-RU" sz="2800" spc="-1" strike="noStrike">
+              <a:rPr b="0" lang="en-US" sz="1800" spc="-1" strike="noStrike">
+                <a:latin typeface="Arial"/>
+              </a:rPr>
+              <a:t>Second Outline Level</a:t>
+            </a:r>
+            <a:endParaRPr b="0" lang="en-US" sz="1800" spc="-1" strike="noStrike">
               <a:latin typeface="Arial"/>
             </a:endParaRPr>
           </a:p>
@@ -3298,12 +3131,12 @@
               <a:buChar char=""/>
             </a:pPr>
             <a:r>
-              <a:rPr b="0" lang="ru-RU" sz="2400" spc="-1" strike="noStrike">
-                <a:latin typeface="Arial"/>
-              </a:rPr>
-              <a:t>Третий уровень структуры</a:t>
-            </a:r>
-            <a:endParaRPr b="0" lang="ru-RU" sz="2400" spc="-1" strike="noStrike">
+              <a:rPr b="0" lang="en-US" sz="1800" spc="-1" strike="noStrike">
+                <a:latin typeface="Arial"/>
+              </a:rPr>
+              <a:t>Third Outline Level</a:t>
+            </a:r>
+            <a:endParaRPr b="0" lang="en-US" sz="1800" spc="-1" strike="noStrike">
               <a:latin typeface="Arial"/>
             </a:endParaRPr>
           </a:p>
@@ -3320,12 +3153,12 @@
               <a:buChar char=""/>
             </a:pPr>
             <a:r>
-              <a:rPr b="0" lang="ru-RU" sz="2000" spc="-1" strike="noStrike">
-                <a:latin typeface="Arial"/>
-              </a:rPr>
-              <a:t>Четвёртый уровень структуры</a:t>
-            </a:r>
-            <a:endParaRPr b="0" lang="ru-RU" sz="2000" spc="-1" strike="noStrike">
+              <a:rPr b="0" lang="en-US" sz="1800" spc="-1" strike="noStrike">
+                <a:latin typeface="Arial"/>
+              </a:rPr>
+              <a:t>Fourth Outline Level</a:t>
+            </a:r>
+            <a:endParaRPr b="0" lang="en-US" sz="1800" spc="-1" strike="noStrike">
               <a:latin typeface="Arial"/>
             </a:endParaRPr>
           </a:p>
@@ -3342,12 +3175,12 @@
               <a:buChar char=""/>
             </a:pPr>
             <a:r>
-              <a:rPr b="0" lang="ru-RU" sz="2000" spc="-1" strike="noStrike">
-                <a:latin typeface="Arial"/>
-              </a:rPr>
-              <a:t>Пятый уровень структуры</a:t>
-            </a:r>
-            <a:endParaRPr b="0" lang="ru-RU" sz="2000" spc="-1" strike="noStrike">
+              <a:rPr b="0" lang="en-US" sz="1800" spc="-1" strike="noStrike">
+                <a:latin typeface="Arial"/>
+              </a:rPr>
+              <a:t>Fifth Outline Level</a:t>
+            </a:r>
+            <a:endParaRPr b="0" lang="en-US" sz="1800" spc="-1" strike="noStrike">
               <a:latin typeface="Arial"/>
             </a:endParaRPr>
           </a:p>
@@ -3364,12 +3197,12 @@
               <a:buChar char=""/>
             </a:pPr>
             <a:r>
-              <a:rPr b="0" lang="ru-RU" sz="2000" spc="-1" strike="noStrike">
-                <a:latin typeface="Arial"/>
-              </a:rPr>
-              <a:t>Шестой уровень структуры</a:t>
-            </a:r>
-            <a:endParaRPr b="0" lang="ru-RU" sz="2000" spc="-1" strike="noStrike">
+              <a:rPr b="0" lang="en-US" sz="1800" spc="-1" strike="noStrike">
+                <a:latin typeface="Arial"/>
+              </a:rPr>
+              <a:t>Sixth Outline Level</a:t>
+            </a:r>
+            <a:endParaRPr b="0" lang="en-US" sz="1800" spc="-1" strike="noStrike">
               <a:latin typeface="Arial"/>
             </a:endParaRPr>
           </a:p>
@@ -3386,13 +3219,180 @@
               <a:buChar char=""/>
             </a:pPr>
             <a:r>
-              <a:rPr b="0" lang="ru-RU" sz="2000" spc="-1" strike="noStrike">
-                <a:latin typeface="Arial"/>
-              </a:rPr>
-              <a:t>Седьмой уровень структуры</a:t>
-            </a:r>
-            <a:endParaRPr b="0" lang="ru-RU" sz="2000" spc="-1" strike="noStrike">
-              <a:latin typeface="Arial"/>
+              <a:rPr b="0" lang="en-US" sz="1800" spc="-1" strike="noStrike">
+                <a:latin typeface="Arial"/>
+              </a:rPr>
+              <a:t>Seventh Outline Level</a:t>
+            </a:r>
+            <a:endParaRPr b="0" lang="en-US" sz="1800" spc="-1" strike="noStrike">
+              <a:latin typeface="Arial"/>
+            </a:endParaRPr>
+          </a:p>
+        </p:txBody>
+      </p:sp>
+      <p:sp>
+        <p:nvSpPr>
+          <p:cNvPr id="2" name="PlaceHolder 3"/>
+          <p:cNvSpPr>
+            <a:spLocks noGrp="1"/>
+          </p:cNvSpPr>
+          <p:nvPr>
+            <p:ph type="ftr" idx="1"/>
+          </p:nvPr>
+        </p:nvSpPr>
+        <p:spPr>
+          <a:xfrm>
+            <a:off x="3029040" y="4767120"/>
+            <a:ext cx="3085200" cy="272880"/>
+          </a:xfrm>
+          <a:prstGeom prst="rect">
+            <a:avLst/>
+          </a:prstGeom>
+          <a:noFill/>
+          <a:ln w="0">
+            <a:noFill/>
+          </a:ln>
+        </p:spPr>
+        <p:txBody>
+          <a:bodyPr lIns="90000" rIns="90000" tIns="45000" bIns="45000" anchor="ctr">
+            <a:noAutofit/>
+          </a:bodyPr>
+          <a:lstStyle>
+            <a:lvl1pPr algn="ctr">
+              <a:lnSpc>
+                <a:spcPct val="100000"/>
+              </a:lnSpc>
+              <a:buNone/>
+              <a:defRPr b="0" lang="en-US" sz="1400" spc="-1" strike="noStrike">
+                <a:latin typeface="Times New Roman"/>
+              </a:defRPr>
+            </a:lvl1pPr>
+          </a:lstStyle>
+          <a:p>
+            <a:pPr algn="ctr">
+              <a:lnSpc>
+                <a:spcPct val="100000"/>
+              </a:lnSpc>
+              <a:buNone/>
+            </a:pPr>
+            <a:r>
+              <a:rPr b="0" lang="en-US" sz="1400" spc="-1" strike="noStrike">
+                <a:latin typeface="Times New Roman"/>
+              </a:rPr>
+              <a:t>&lt;footer&gt;</a:t>
+            </a:r>
+            <a:endParaRPr b="0" lang="en-US" sz="1400" spc="-1" strike="noStrike">
+              <a:latin typeface="Times New Roman"/>
+            </a:endParaRPr>
+          </a:p>
+        </p:txBody>
+      </p:sp>
+      <p:sp>
+        <p:nvSpPr>
+          <p:cNvPr id="3" name="PlaceHolder 4"/>
+          <p:cNvSpPr>
+            <a:spLocks noGrp="1"/>
+          </p:cNvSpPr>
+          <p:nvPr>
+            <p:ph type="sldNum" idx="2"/>
+          </p:nvPr>
+        </p:nvSpPr>
+        <p:spPr>
+          <a:xfrm>
+            <a:off x="6458040" y="4767120"/>
+            <a:ext cx="2056320" cy="272880"/>
+          </a:xfrm>
+          <a:prstGeom prst="rect">
+            <a:avLst/>
+          </a:prstGeom>
+          <a:noFill/>
+          <a:ln w="0">
+            <a:noFill/>
+          </a:ln>
+        </p:spPr>
+        <p:txBody>
+          <a:bodyPr lIns="90000" rIns="90000" tIns="45000" bIns="45000" anchor="ctr">
+            <a:noAutofit/>
+          </a:bodyPr>
+          <a:lstStyle>
+            <a:lvl1pPr algn="r">
+              <a:lnSpc>
+                <a:spcPct val="100000"/>
+              </a:lnSpc>
+              <a:buNone/>
+              <a:defRPr b="0" lang="en-US" sz="900" spc="-1" strike="noStrike">
+                <a:solidFill>
+                  <a:srgbClr val="8b8b8b"/>
+                </a:solidFill>
+                <a:latin typeface="Calibri"/>
+              </a:defRPr>
+            </a:lvl1pPr>
+          </a:lstStyle>
+          <a:p>
+            <a:pPr algn="r">
+              <a:lnSpc>
+                <a:spcPct val="100000"/>
+              </a:lnSpc>
+              <a:buNone/>
+            </a:pPr>
+            <a:fld id="{5E8A685E-D475-4E7B-9EC4-045894216A4A}" type="slidenum">
+              <a:rPr b="0" lang="en-US" sz="900" spc="-1" strike="noStrike">
+                <a:solidFill>
+                  <a:srgbClr val="8b8b8b"/>
+                </a:solidFill>
+                <a:latin typeface="Calibri"/>
+              </a:rPr>
+              <a:t>&lt;number&gt;</a:t>
+            </a:fld>
+            <a:endParaRPr b="0" lang="en-US" sz="900" spc="-1" strike="noStrike">
+              <a:latin typeface="Times New Roman"/>
+            </a:endParaRPr>
+          </a:p>
+        </p:txBody>
+      </p:sp>
+      <p:sp>
+        <p:nvSpPr>
+          <p:cNvPr id="4" name="PlaceHolder 5"/>
+          <p:cNvSpPr>
+            <a:spLocks noGrp="1"/>
+          </p:cNvSpPr>
+          <p:nvPr>
+            <p:ph type="dt" idx="3"/>
+          </p:nvPr>
+        </p:nvSpPr>
+        <p:spPr>
+          <a:xfrm>
+            <a:off x="628560" y="4767120"/>
+            <a:ext cx="2056320" cy="272880"/>
+          </a:xfrm>
+          <a:prstGeom prst="rect">
+            <a:avLst/>
+          </a:prstGeom>
+          <a:noFill/>
+          <a:ln w="0">
+            <a:noFill/>
+          </a:ln>
+        </p:spPr>
+        <p:txBody>
+          <a:bodyPr lIns="90000" rIns="90000" tIns="45000" bIns="45000" anchor="ctr">
+            <a:noAutofit/>
+          </a:bodyPr>
+          <a:lstStyle>
+            <a:lvl1pPr>
+              <a:defRPr b="0" lang="en-US" sz="1400" spc="-1" strike="noStrike">
+                <a:latin typeface="Times New Roman"/>
+              </a:defRPr>
+            </a:lvl1pPr>
+          </a:lstStyle>
+          <a:p>
+            <a:r>
+              <a:rPr b="0" lang="en-US" sz="1400" spc="-1" strike="noStrike">
+                <a:latin typeface="Times New Roman"/>
+              </a:rPr>
+              <a:t>&lt;date/time&gt;</a:t>
+            </a:r>
+            <a:endParaRPr b="0" lang="en-US" sz="1400" spc="-1" strike="noStrike">
+              <a:latin typeface="Times New Roman"/>
             </a:endParaRPr>
           </a:p>
         </p:txBody>
@@ -3450,7 +3450,7 @@
         <p:spPr>
           <a:xfrm>
             <a:off x="186840" y="185400"/>
-            <a:ext cx="8769960" cy="4757760"/>
+            <a:ext cx="8769600" cy="4757400"/>
           </a:xfrm>
           <a:prstGeom prst="roundRect">
             <a:avLst>
@@ -3488,7 +3488,7 @@
         <p:spPr>
           <a:xfrm>
             <a:off x="460080" y="658080"/>
-            <a:ext cx="8468640" cy="3306600"/>
+            <a:ext cx="8468280" cy="3306240"/>
           </a:xfrm>
           <a:prstGeom prst="rect">
             <a:avLst/>
@@ -3525,59 +3525,7 @@
               </a:rPr>
               <a:t>TITLE</a:t>
             </a:r>
-            <a:endParaRPr b="0" lang="ru-RU" sz="5400" spc="-1" strike="noStrike">
-              <a:latin typeface="Arial"/>
-            </a:endParaRPr>
-          </a:p>
-        </p:txBody>
-      </p:sp>
-      <p:sp>
-        <p:nvSpPr>
-          <p:cNvPr id="49" name="Прямоугольник 5"/>
-          <p:cNvSpPr/>
-          <p:nvPr/>
-        </p:nvSpPr>
-        <p:spPr>
-          <a:xfrm>
-            <a:off x="460080" y="358920"/>
-            <a:ext cx="2998800" cy="269280"/>
-          </a:xfrm>
-          <a:prstGeom prst="rect">
-            <a:avLst/>
-          </a:prstGeom>
-          <a:noFill/>
-          <a:ln w="0">
-            <a:noFill/>
-          </a:ln>
-        </p:spPr>
-        <p:style>
-          <a:lnRef idx="0"/>
-          <a:fillRef idx="0"/>
-          <a:effectRef idx="0"/>
-          <a:fontRef idx="minor"/>
-        </p:style>
-        <p:txBody>
-          <a:bodyPr lIns="90000" rIns="90000" tIns="45000" bIns="45000" anchor="t">
-            <a:noAutofit/>
-          </a:bodyPr>
-          <a:p>
-            <a:pPr>
-              <a:lnSpc>
-                <a:spcPts val="1650"/>
-              </a:lnSpc>
-              <a:buNone/>
-            </a:pPr>
-            <a:r>
-              <a:rPr b="0" lang="ru-RU" sz="1400" spc="-1" strike="noStrike">
-                <a:solidFill>
-                  <a:srgbClr val="f2f2f2"/>
-                </a:solidFill>
-                <a:latin typeface="Arial"/>
-                <a:ea typeface="DejaVu Sans"/>
-              </a:rPr>
-              <a:t>Тема:</a:t>
-            </a:r>
-            <a:endParaRPr b="0" lang="ru-RU" sz="1400" spc="-1" strike="noStrike">
+            <a:endParaRPr b="0" lang="en-US" sz="5400" spc="-1" strike="noStrike">
               <a:latin typeface="Arial"/>
             </a:endParaRPr>
           </a:p>
@@ -3622,14 +3570,14 @@
       </p:grpSpPr>
       <p:sp>
         <p:nvSpPr>
-          <p:cNvPr id="147" name="Прямоугольник со скругленными углами 3"/>
+          <p:cNvPr id="146" name="Прямоугольник со скругленными углами 3"/>
           <p:cNvSpPr/>
           <p:nvPr/>
         </p:nvSpPr>
         <p:spPr>
           <a:xfrm>
             <a:off x="186840" y="185400"/>
-            <a:ext cx="8769960" cy="4757760"/>
+            <a:ext cx="8769600" cy="4757400"/>
           </a:xfrm>
           <a:prstGeom prst="roundRect">
             <a:avLst>
@@ -3660,14 +3608,14 @@
       </p:sp>
       <p:sp>
         <p:nvSpPr>
-          <p:cNvPr id="148" name="Прямоугольник 10"/>
+          <p:cNvPr id="147" name="Прямоугольник 10"/>
           <p:cNvSpPr/>
           <p:nvPr/>
         </p:nvSpPr>
         <p:spPr>
           <a:xfrm>
             <a:off x="460080" y="658080"/>
-            <a:ext cx="8468640" cy="3306600"/>
+            <a:ext cx="8468280" cy="3306240"/>
           </a:xfrm>
           <a:prstGeom prst="rect">
             <a:avLst/>
@@ -3704,7 +3652,7 @@
               </a:rPr>
               <a:t>TITLE</a:t>
             </a:r>
-            <a:endParaRPr b="0" lang="ru-RU" sz="5400" spc="-1" strike="noStrike">
+            <a:endParaRPr b="0" lang="en-US" sz="5400" spc="-1" strike="noStrike">
               <a:latin typeface="Arial"/>
             </a:endParaRPr>
           </a:p>
@@ -3749,14 +3697,14 @@
       </p:grpSpPr>
       <p:sp>
         <p:nvSpPr>
-          <p:cNvPr id="50" name="Прямоугольник со скругленными углами 3"/>
+          <p:cNvPr id="49" name="Прямоугольник со скругленными углами 3"/>
           <p:cNvSpPr/>
           <p:nvPr/>
         </p:nvSpPr>
         <p:spPr>
           <a:xfrm>
             <a:off x="3507480" y="0"/>
-            <a:ext cx="5635800" cy="5142960"/>
+            <a:ext cx="5635440" cy="5142600"/>
           </a:xfrm>
           <a:prstGeom prst="roundRect">
             <a:avLst>
@@ -3805,22 +3753,22 @@
               </a:rPr>
               <a:t>PIC</a:t>
             </a:r>
-            <a:endParaRPr b="0" lang="ru-RU" sz="1800" spc="-1" strike="noStrike">
-              <a:latin typeface="Arial"/>
-            </a:endParaRPr>
-          </a:p>
-        </p:txBody>
-      </p:sp>
-      <p:sp>
-        <p:nvSpPr>
-          <p:cNvPr id="51" name="Прямоугольник: скругленные углы 2"/>
+            <a:endParaRPr b="0" lang="en-US" sz="1800" spc="-1" strike="noStrike">
+              <a:latin typeface="Arial"/>
+            </a:endParaRPr>
+          </a:p>
+        </p:txBody>
+      </p:sp>
+      <p:sp>
+        <p:nvSpPr>
+          <p:cNvPr id="50" name="Прямоугольник: скругленные углы 2"/>
           <p:cNvSpPr/>
           <p:nvPr/>
         </p:nvSpPr>
         <p:spPr>
           <a:xfrm>
             <a:off x="3722040" y="257040"/>
-            <a:ext cx="5185800" cy="4649760"/>
+            <a:ext cx="5185440" cy="4649400"/>
           </a:xfrm>
           <a:prstGeom prst="roundRect">
             <a:avLst>
@@ -3854,14 +3802,14 @@
       </p:sp>
       <p:sp>
         <p:nvSpPr>
-          <p:cNvPr id="52" name="Овал 1"/>
+          <p:cNvPr id="51" name="Овал 1"/>
           <p:cNvSpPr/>
           <p:nvPr/>
         </p:nvSpPr>
         <p:spPr>
           <a:xfrm>
             <a:off x="4122000" y="631080"/>
-            <a:ext cx="899280" cy="899280"/>
+            <a:ext cx="898920" cy="898920"/>
           </a:xfrm>
           <a:prstGeom prst="ellipse">
             <a:avLst/>
@@ -3908,22 +3856,22 @@
               </a:rPr>
               <a:t>01</a:t>
             </a:r>
-            <a:endParaRPr b="0" lang="ru-RU" sz="1800" spc="-1" strike="noStrike">
-              <a:latin typeface="Arial"/>
-            </a:endParaRPr>
-          </a:p>
-        </p:txBody>
-      </p:sp>
-      <p:sp>
-        <p:nvSpPr>
-          <p:cNvPr id="53" name="Овал 23"/>
+            <a:endParaRPr b="0" lang="en-US" sz="1800" spc="-1" strike="noStrike">
+              <a:latin typeface="Arial"/>
+            </a:endParaRPr>
+          </a:p>
+        </p:txBody>
+      </p:sp>
+      <p:sp>
+        <p:nvSpPr>
+          <p:cNvPr id="52" name="Овал 23"/>
           <p:cNvSpPr/>
           <p:nvPr/>
         </p:nvSpPr>
         <p:spPr>
           <a:xfrm>
             <a:off x="4122000" y="2127600"/>
-            <a:ext cx="899280" cy="887400"/>
+            <a:ext cx="898920" cy="887040"/>
           </a:xfrm>
           <a:prstGeom prst="ellipse">
             <a:avLst/>
@@ -3970,22 +3918,22 @@
               </a:rPr>
               <a:t>02</a:t>
             </a:r>
-            <a:endParaRPr b="0" lang="ru-RU" sz="1800" spc="-1" strike="noStrike">
-              <a:latin typeface="Arial"/>
-            </a:endParaRPr>
-          </a:p>
-        </p:txBody>
-      </p:sp>
-      <p:sp>
-        <p:nvSpPr>
-          <p:cNvPr id="54" name="Овал 29"/>
+            <a:endParaRPr b="0" lang="en-US" sz="1800" spc="-1" strike="noStrike">
+              <a:latin typeface="Arial"/>
+            </a:endParaRPr>
+          </a:p>
+        </p:txBody>
+      </p:sp>
+      <p:sp>
+        <p:nvSpPr>
+          <p:cNvPr id="53" name="Овал 29"/>
           <p:cNvSpPr/>
           <p:nvPr/>
         </p:nvSpPr>
         <p:spPr>
           <a:xfrm>
             <a:off x="4122000" y="3612240"/>
-            <a:ext cx="899280" cy="899280"/>
+            <a:ext cx="898920" cy="898920"/>
           </a:xfrm>
           <a:prstGeom prst="ellipse">
             <a:avLst/>
@@ -4032,22 +3980,22 @@
               </a:rPr>
               <a:t>03</a:t>
             </a:r>
-            <a:endParaRPr b="0" lang="ru-RU" sz="1800" spc="-1" strike="noStrike">
-              <a:latin typeface="Arial"/>
-            </a:endParaRPr>
-          </a:p>
-        </p:txBody>
-      </p:sp>
-      <p:sp>
-        <p:nvSpPr>
-          <p:cNvPr id="55" name="TextBox 10"/>
+            <a:endParaRPr b="0" lang="en-US" sz="1800" spc="-1" strike="noStrike">
+              <a:latin typeface="Arial"/>
+            </a:endParaRPr>
+          </a:p>
+        </p:txBody>
+      </p:sp>
+      <p:sp>
+        <p:nvSpPr>
+          <p:cNvPr id="54" name="TextBox 10"/>
           <p:cNvSpPr/>
           <p:nvPr/>
         </p:nvSpPr>
         <p:spPr>
           <a:xfrm>
             <a:off x="5110920" y="489600"/>
-            <a:ext cx="3578760" cy="550440"/>
+            <a:ext cx="3578400" cy="550080"/>
           </a:xfrm>
           <a:prstGeom prst="rect">
             <a:avLst/>
@@ -4094,22 +4042,22 @@
               </a:rPr>
               <a:t>1</a:t>
             </a:r>
-            <a:endParaRPr b="0" lang="ru-RU" sz="1400" spc="-1" strike="noStrike">
-              <a:latin typeface="Arial"/>
-            </a:endParaRPr>
-          </a:p>
-        </p:txBody>
-      </p:sp>
-      <p:sp>
-        <p:nvSpPr>
-          <p:cNvPr id="56" name="TextBox 10"/>
+            <a:endParaRPr b="0" lang="en-US" sz="1400" spc="-1" strike="noStrike">
+              <a:latin typeface="Arial"/>
+            </a:endParaRPr>
+          </a:p>
+        </p:txBody>
+      </p:sp>
+      <p:sp>
+        <p:nvSpPr>
+          <p:cNvPr id="55" name="TextBox 10"/>
           <p:cNvSpPr/>
           <p:nvPr/>
         </p:nvSpPr>
         <p:spPr>
           <a:xfrm>
             <a:off x="5110920" y="1025280"/>
-            <a:ext cx="3578760" cy="789480"/>
+            <a:ext cx="3578400" cy="789120"/>
           </a:xfrm>
           <a:prstGeom prst="rect">
             <a:avLst/>
@@ -4156,22 +4104,22 @@
               </a:rPr>
               <a:t>1</a:t>
             </a:r>
-            <a:endParaRPr b="0" lang="ru-RU" sz="1100" spc="-1" strike="noStrike">
-              <a:latin typeface="Arial"/>
-            </a:endParaRPr>
-          </a:p>
-        </p:txBody>
-      </p:sp>
-      <p:sp>
-        <p:nvSpPr>
-          <p:cNvPr id="57" name="TextBox 10"/>
+            <a:endParaRPr b="0" lang="en-US" sz="1100" spc="-1" strike="noStrike">
+              <a:latin typeface="Arial"/>
+            </a:endParaRPr>
+          </a:p>
+        </p:txBody>
+      </p:sp>
+      <p:sp>
+        <p:nvSpPr>
+          <p:cNvPr id="56" name="TextBox 10"/>
           <p:cNvSpPr/>
           <p:nvPr/>
         </p:nvSpPr>
         <p:spPr>
           <a:xfrm>
             <a:off x="5107320" y="1985400"/>
-            <a:ext cx="3578760" cy="550440"/>
+            <a:ext cx="3578400" cy="550080"/>
           </a:xfrm>
           <a:prstGeom prst="rect">
             <a:avLst/>
@@ -4208,22 +4156,22 @@
               </a:rPr>
               <a:t>SUBTITLE2</a:t>
             </a:r>
-            <a:endParaRPr b="0" lang="ru-RU" sz="1400" spc="-1" strike="noStrike">
-              <a:latin typeface="Arial"/>
-            </a:endParaRPr>
-          </a:p>
-        </p:txBody>
-      </p:sp>
-      <p:sp>
-        <p:nvSpPr>
-          <p:cNvPr id="58" name="TextBox 10"/>
+            <a:endParaRPr b="0" lang="en-US" sz="1400" spc="-1" strike="noStrike">
+              <a:latin typeface="Arial"/>
+            </a:endParaRPr>
+          </a:p>
+        </p:txBody>
+      </p:sp>
+      <p:sp>
+        <p:nvSpPr>
+          <p:cNvPr id="57" name="TextBox 10"/>
           <p:cNvSpPr/>
           <p:nvPr/>
         </p:nvSpPr>
         <p:spPr>
           <a:xfrm>
             <a:off x="5107320" y="2517840"/>
-            <a:ext cx="3578760" cy="843120"/>
+            <a:ext cx="3578400" cy="842760"/>
           </a:xfrm>
           <a:prstGeom prst="rect">
             <a:avLst/>
@@ -4270,22 +4218,22 @@
               </a:rPr>
               <a:t>2</a:t>
             </a:r>
-            <a:endParaRPr b="0" lang="ru-RU" sz="1100" spc="-1" strike="noStrike">
-              <a:latin typeface="Arial"/>
-            </a:endParaRPr>
-          </a:p>
-        </p:txBody>
-      </p:sp>
-      <p:sp>
-        <p:nvSpPr>
-          <p:cNvPr id="59" name="TextBox 10"/>
+            <a:endParaRPr b="0" lang="en-US" sz="1100" spc="-1" strike="noStrike">
+              <a:latin typeface="Arial"/>
+            </a:endParaRPr>
+          </a:p>
+        </p:txBody>
+      </p:sp>
+      <p:sp>
+        <p:nvSpPr>
+          <p:cNvPr id="58" name="TextBox 10"/>
           <p:cNvSpPr/>
           <p:nvPr/>
         </p:nvSpPr>
         <p:spPr>
           <a:xfrm>
             <a:off x="5107320" y="3470760"/>
-            <a:ext cx="3578760" cy="550440"/>
+            <a:ext cx="3578400" cy="550080"/>
           </a:xfrm>
           <a:prstGeom prst="rect">
             <a:avLst/>
@@ -4322,22 +4270,22 @@
               </a:rPr>
               <a:t>SUBTITLE3</a:t>
             </a:r>
-            <a:endParaRPr b="0" lang="ru-RU" sz="1400" spc="-1" strike="noStrike">
-              <a:latin typeface="Arial"/>
-            </a:endParaRPr>
-          </a:p>
-        </p:txBody>
-      </p:sp>
-      <p:sp>
-        <p:nvSpPr>
-          <p:cNvPr id="60" name="TextBox 10"/>
+            <a:endParaRPr b="0" lang="en-US" sz="1400" spc="-1" strike="noStrike">
+              <a:latin typeface="Arial"/>
+            </a:endParaRPr>
+          </a:p>
+        </p:txBody>
+      </p:sp>
+      <p:sp>
+        <p:nvSpPr>
+          <p:cNvPr id="59" name="TextBox 10"/>
           <p:cNvSpPr/>
           <p:nvPr/>
         </p:nvSpPr>
         <p:spPr>
           <a:xfrm>
             <a:off x="5107320" y="4003560"/>
-            <a:ext cx="3578760" cy="794520"/>
+            <a:ext cx="3578400" cy="794160"/>
           </a:xfrm>
           <a:prstGeom prst="rect">
             <a:avLst/>
@@ -4384,22 +4332,22 @@
               </a:rPr>
               <a:t>3</a:t>
             </a:r>
-            <a:endParaRPr b="0" lang="ru-RU" sz="1100" spc="-1" strike="noStrike">
-              <a:latin typeface="Arial"/>
-            </a:endParaRPr>
-          </a:p>
-        </p:txBody>
-      </p:sp>
-      <p:sp>
-        <p:nvSpPr>
-          <p:cNvPr id="61" name="TextBox 13"/>
+            <a:endParaRPr b="0" lang="en-US" sz="1100" spc="-1" strike="noStrike">
+              <a:latin typeface="Arial"/>
+            </a:endParaRPr>
+          </a:p>
+        </p:txBody>
+      </p:sp>
+      <p:sp>
+        <p:nvSpPr>
+          <p:cNvPr id="60" name="TextBox 13"/>
           <p:cNvSpPr/>
           <p:nvPr/>
         </p:nvSpPr>
         <p:spPr>
           <a:xfrm>
             <a:off x="165960" y="200880"/>
-            <a:ext cx="3147840" cy="1841760"/>
+            <a:ext cx="3147480" cy="1841400"/>
           </a:xfrm>
           <a:prstGeom prst="rect">
             <a:avLst/>
@@ -4436,7 +4384,7 @@
               </a:rPr>
               <a:t>TITLE</a:t>
             </a:r>
-            <a:endParaRPr b="0" lang="ru-RU" sz="2200" spc="-1" strike="noStrike">
+            <a:endParaRPr b="0" lang="en-US" sz="2200" spc="-1" strike="noStrike">
               <a:latin typeface="Arial"/>
             </a:endParaRPr>
           </a:p>
@@ -4481,14 +4429,14 @@
       </p:grpSpPr>
       <p:sp>
         <p:nvSpPr>
-          <p:cNvPr id="62" name="Прямоугольник со скругленными углами 3"/>
+          <p:cNvPr id="61" name="Прямоугольник со скругленными углами 3"/>
           <p:cNvSpPr/>
           <p:nvPr/>
         </p:nvSpPr>
         <p:spPr>
           <a:xfrm>
             <a:off x="0" y="0"/>
-            <a:ext cx="9143280" cy="1961280"/>
+            <a:ext cx="9142920" cy="1960920"/>
           </a:xfrm>
           <a:prstGeom prst="roundRect">
             <a:avLst>
@@ -4539,22 +4487,22 @@
               </a:rPr>
               <a:t>PIC</a:t>
             </a:r>
-            <a:endParaRPr b="0" lang="ru-RU" sz="1800" spc="-1" strike="noStrike">
-              <a:latin typeface="Arial"/>
-            </a:endParaRPr>
-          </a:p>
-        </p:txBody>
-      </p:sp>
-      <p:sp>
-        <p:nvSpPr>
-          <p:cNvPr id="63" name="TextBox 10"/>
+            <a:endParaRPr b="0" lang="en-US" sz="1800" spc="-1" strike="noStrike">
+              <a:latin typeface="Arial"/>
+            </a:endParaRPr>
+          </a:p>
+        </p:txBody>
+      </p:sp>
+      <p:sp>
+        <p:nvSpPr>
+          <p:cNvPr id="62" name="TextBox 10"/>
           <p:cNvSpPr/>
           <p:nvPr/>
         </p:nvSpPr>
         <p:spPr>
           <a:xfrm>
             <a:off x="384840" y="2571840"/>
-            <a:ext cx="2664720" cy="713520"/>
+            <a:ext cx="2664360" cy="713160"/>
           </a:xfrm>
           <a:prstGeom prst="rect">
             <a:avLst/>
@@ -4591,22 +4539,22 @@
               </a:rPr>
               <a:t>SUBTITLE1</a:t>
             </a:r>
-            <a:endParaRPr b="0" lang="ru-RU" sz="1400" spc="-1" strike="noStrike">
-              <a:latin typeface="Arial"/>
-            </a:endParaRPr>
-          </a:p>
-        </p:txBody>
-      </p:sp>
-      <p:sp>
-        <p:nvSpPr>
-          <p:cNvPr id="64" name="TextBox 10"/>
+            <a:endParaRPr b="0" lang="en-US" sz="1400" spc="-1" strike="noStrike">
+              <a:latin typeface="Arial"/>
+            </a:endParaRPr>
+          </a:p>
+        </p:txBody>
+      </p:sp>
+      <p:sp>
+        <p:nvSpPr>
+          <p:cNvPr id="63" name="TextBox 10"/>
           <p:cNvSpPr/>
           <p:nvPr/>
         </p:nvSpPr>
         <p:spPr>
           <a:xfrm>
             <a:off x="384840" y="3356280"/>
-            <a:ext cx="2664720" cy="1564920"/>
+            <a:ext cx="2664360" cy="1564560"/>
           </a:xfrm>
           <a:prstGeom prst="rect">
             <a:avLst/>
@@ -4653,22 +4601,22 @@
               </a:rPr>
               <a:t>1</a:t>
             </a:r>
-            <a:endParaRPr b="0" lang="ru-RU" sz="1100" spc="-1" strike="noStrike">
-              <a:latin typeface="Arial"/>
-            </a:endParaRPr>
-          </a:p>
-        </p:txBody>
-      </p:sp>
-      <p:sp>
-        <p:nvSpPr>
-          <p:cNvPr id="65" name="TextBox 10"/>
+            <a:endParaRPr b="0" lang="en-US" sz="1100" spc="-1" strike="noStrike">
+              <a:latin typeface="Arial"/>
+            </a:endParaRPr>
+          </a:p>
+        </p:txBody>
+      </p:sp>
+      <p:sp>
+        <p:nvSpPr>
+          <p:cNvPr id="64" name="TextBox 10"/>
           <p:cNvSpPr/>
           <p:nvPr/>
         </p:nvSpPr>
         <p:spPr>
           <a:xfrm>
             <a:off x="3239280" y="2571840"/>
-            <a:ext cx="2664720" cy="713520"/>
+            <a:ext cx="2664360" cy="713160"/>
           </a:xfrm>
           <a:prstGeom prst="rect">
             <a:avLst/>
@@ -4705,22 +4653,22 @@
               </a:rPr>
               <a:t>SUBTITLE2</a:t>
             </a:r>
-            <a:endParaRPr b="0" lang="ru-RU" sz="1400" spc="-1" strike="noStrike">
-              <a:latin typeface="Arial"/>
-            </a:endParaRPr>
-          </a:p>
-        </p:txBody>
-      </p:sp>
-      <p:sp>
-        <p:nvSpPr>
-          <p:cNvPr id="66" name="TextBox 10"/>
+            <a:endParaRPr b="0" lang="en-US" sz="1400" spc="-1" strike="noStrike">
+              <a:latin typeface="Arial"/>
+            </a:endParaRPr>
+          </a:p>
+        </p:txBody>
+      </p:sp>
+      <p:sp>
+        <p:nvSpPr>
+          <p:cNvPr id="65" name="TextBox 10"/>
           <p:cNvSpPr/>
           <p:nvPr/>
         </p:nvSpPr>
         <p:spPr>
           <a:xfrm>
             <a:off x="3239280" y="3356280"/>
-            <a:ext cx="2664720" cy="1564920"/>
+            <a:ext cx="2664360" cy="1564560"/>
           </a:xfrm>
           <a:prstGeom prst="rect">
             <a:avLst/>
@@ -4767,22 +4715,22 @@
               </a:rPr>
               <a:t>2</a:t>
             </a:r>
-            <a:endParaRPr b="0" lang="ru-RU" sz="1100" spc="-1" strike="noStrike">
-              <a:latin typeface="Arial"/>
-            </a:endParaRPr>
-          </a:p>
-        </p:txBody>
-      </p:sp>
-      <p:sp>
-        <p:nvSpPr>
-          <p:cNvPr id="67" name="TextBox 10"/>
+            <a:endParaRPr b="0" lang="en-US" sz="1100" spc="-1" strike="noStrike">
+              <a:latin typeface="Arial"/>
+            </a:endParaRPr>
+          </a:p>
+        </p:txBody>
+      </p:sp>
+      <p:sp>
+        <p:nvSpPr>
+          <p:cNvPr id="66" name="TextBox 10"/>
           <p:cNvSpPr/>
           <p:nvPr/>
         </p:nvSpPr>
         <p:spPr>
           <a:xfrm>
             <a:off x="6093720" y="2571840"/>
-            <a:ext cx="2664720" cy="713520"/>
+            <a:ext cx="2664360" cy="713160"/>
           </a:xfrm>
           <a:prstGeom prst="rect">
             <a:avLst/>
@@ -4819,22 +4767,22 @@
               </a:rPr>
               <a:t>SUBTITLE3</a:t>
             </a:r>
-            <a:endParaRPr b="0" lang="ru-RU" sz="1400" spc="-1" strike="noStrike">
-              <a:latin typeface="Arial"/>
-            </a:endParaRPr>
-          </a:p>
-        </p:txBody>
-      </p:sp>
-      <p:sp>
-        <p:nvSpPr>
-          <p:cNvPr id="68" name="TextBox 10"/>
+            <a:endParaRPr b="0" lang="en-US" sz="1400" spc="-1" strike="noStrike">
+              <a:latin typeface="Arial"/>
+            </a:endParaRPr>
+          </a:p>
+        </p:txBody>
+      </p:sp>
+      <p:sp>
+        <p:nvSpPr>
+          <p:cNvPr id="67" name="TextBox 10"/>
           <p:cNvSpPr/>
           <p:nvPr/>
         </p:nvSpPr>
         <p:spPr>
           <a:xfrm>
             <a:off x="6093720" y="3356280"/>
-            <a:ext cx="2664720" cy="1564920"/>
+            <a:ext cx="2664360" cy="1564560"/>
           </a:xfrm>
           <a:prstGeom prst="rect">
             <a:avLst/>
@@ -4881,22 +4829,22 @@
               </a:rPr>
               <a:t>3</a:t>
             </a:r>
-            <a:endParaRPr b="0" lang="ru-RU" sz="1100" spc="-1" strike="noStrike">
-              <a:latin typeface="Arial"/>
-            </a:endParaRPr>
-          </a:p>
-        </p:txBody>
-      </p:sp>
-      <p:sp>
-        <p:nvSpPr>
-          <p:cNvPr id="69" name="TextBox 9"/>
+            <a:endParaRPr b="0" lang="en-US" sz="1100" spc="-1" strike="noStrike">
+              <a:latin typeface="Arial"/>
+            </a:endParaRPr>
+          </a:p>
+        </p:txBody>
+      </p:sp>
+      <p:sp>
+        <p:nvSpPr>
+          <p:cNvPr id="68" name="TextBox 9"/>
           <p:cNvSpPr/>
           <p:nvPr/>
         </p:nvSpPr>
         <p:spPr>
           <a:xfrm>
             <a:off x="384840" y="2178000"/>
-            <a:ext cx="8465400" cy="480600"/>
+            <a:ext cx="8465040" cy="480240"/>
           </a:xfrm>
           <a:prstGeom prst="rect">
             <a:avLst/>
@@ -4933,7 +4881,7 @@
               </a:rPr>
               <a:t>TITLE</a:t>
             </a:r>
-            <a:endParaRPr b="0" lang="ru-RU" sz="2200" spc="-1" strike="noStrike">
+            <a:endParaRPr b="0" lang="en-US" sz="2200" spc="-1" strike="noStrike">
               <a:latin typeface="Arial"/>
             </a:endParaRPr>
           </a:p>
@@ -4978,14 +4926,14 @@
       </p:grpSpPr>
       <p:sp>
         <p:nvSpPr>
-          <p:cNvPr id="70" name="Прямоугольник: скругленные углы 15"/>
+          <p:cNvPr id="69" name="Прямоугольник: скругленные углы 15"/>
           <p:cNvSpPr/>
           <p:nvPr/>
         </p:nvSpPr>
         <p:spPr>
           <a:xfrm>
             <a:off x="4636440" y="250200"/>
-            <a:ext cx="4197960" cy="4624920"/>
+            <a:ext cx="4197600" cy="4624560"/>
           </a:xfrm>
           <a:prstGeom prst="roundRect">
             <a:avLst>
@@ -5036,22 +4984,22 @@
               </a:rPr>
               <a:t>PIC</a:t>
             </a:r>
-            <a:endParaRPr b="0" lang="ru-RU" sz="1800" spc="-1" strike="noStrike">
-              <a:latin typeface="Arial"/>
-            </a:endParaRPr>
-          </a:p>
-        </p:txBody>
-      </p:sp>
-      <p:sp>
-        <p:nvSpPr>
-          <p:cNvPr id="71" name="Прямоугольник: скругленные углы 16"/>
+            <a:endParaRPr b="0" lang="en-US" sz="1800" spc="-1" strike="noStrike">
+              <a:latin typeface="Arial"/>
+            </a:endParaRPr>
+          </a:p>
+        </p:txBody>
+      </p:sp>
+      <p:sp>
+        <p:nvSpPr>
+          <p:cNvPr id="70" name="Прямоугольник: скругленные углы 16"/>
           <p:cNvSpPr/>
           <p:nvPr/>
         </p:nvSpPr>
         <p:spPr>
           <a:xfrm>
             <a:off x="329400" y="257040"/>
-            <a:ext cx="4197960" cy="4624920"/>
+            <a:ext cx="4197600" cy="4624560"/>
           </a:xfrm>
           <a:prstGeom prst="roundRect">
             <a:avLst>
@@ -5085,14 +5033,14 @@
       </p:sp>
       <p:sp>
         <p:nvSpPr>
-          <p:cNvPr id="72" name="Овал 9"/>
+          <p:cNvPr id="71" name="Овал 9"/>
           <p:cNvSpPr/>
           <p:nvPr/>
         </p:nvSpPr>
         <p:spPr>
           <a:xfrm>
             <a:off x="4272120" y="1193040"/>
-            <a:ext cx="635040" cy="635040"/>
+            <a:ext cx="634680" cy="634680"/>
           </a:xfrm>
           <a:prstGeom prst="ellipse">
             <a:avLst/>
@@ -5121,14 +5069,14 @@
       </p:sp>
       <p:sp>
         <p:nvSpPr>
-          <p:cNvPr id="73" name="TextBox 10"/>
+          <p:cNvPr id="72" name="TextBox 10"/>
           <p:cNvSpPr/>
           <p:nvPr/>
         </p:nvSpPr>
         <p:spPr>
           <a:xfrm>
             <a:off x="581760" y="828720"/>
-            <a:ext cx="3693240" cy="550440"/>
+            <a:ext cx="3692880" cy="550080"/>
           </a:xfrm>
           <a:prstGeom prst="rect">
             <a:avLst/>
@@ -5175,22 +5123,22 @@
               </a:rPr>
               <a:t>1</a:t>
             </a:r>
-            <a:endParaRPr b="0" lang="ru-RU" sz="1400" spc="-1" strike="noStrike">
-              <a:latin typeface="Arial"/>
-            </a:endParaRPr>
-          </a:p>
-        </p:txBody>
-      </p:sp>
-      <p:sp>
-        <p:nvSpPr>
-          <p:cNvPr id="74" name="TextBox 10"/>
+            <a:endParaRPr b="0" lang="en-US" sz="1400" spc="-1" strike="noStrike">
+              <a:latin typeface="Arial"/>
+            </a:endParaRPr>
+          </a:p>
+        </p:txBody>
+      </p:sp>
+      <p:sp>
+        <p:nvSpPr>
+          <p:cNvPr id="73" name="TextBox 10"/>
           <p:cNvSpPr/>
           <p:nvPr/>
         </p:nvSpPr>
         <p:spPr>
           <a:xfrm>
             <a:off x="581760" y="1364400"/>
-            <a:ext cx="3693240" cy="789480"/>
+            <a:ext cx="3692880" cy="789120"/>
           </a:xfrm>
           <a:prstGeom prst="rect">
             <a:avLst/>
@@ -5237,22 +5185,22 @@
               </a:rPr>
               <a:t>1</a:t>
             </a:r>
-            <a:endParaRPr b="0" lang="ru-RU" sz="1100" spc="-1" strike="noStrike">
-              <a:latin typeface="Arial"/>
-            </a:endParaRPr>
-          </a:p>
-        </p:txBody>
-      </p:sp>
-      <p:sp>
-        <p:nvSpPr>
-          <p:cNvPr id="75" name="TextBox 10"/>
+            <a:endParaRPr b="0" lang="en-US" sz="1100" spc="-1" strike="noStrike">
+              <a:latin typeface="Arial"/>
+            </a:endParaRPr>
+          </a:p>
+        </p:txBody>
+      </p:sp>
+      <p:sp>
+        <p:nvSpPr>
+          <p:cNvPr id="74" name="TextBox 10"/>
           <p:cNvSpPr/>
           <p:nvPr/>
         </p:nvSpPr>
         <p:spPr>
           <a:xfrm>
             <a:off x="578160" y="2154600"/>
-            <a:ext cx="3693240" cy="550440"/>
+            <a:ext cx="3692880" cy="550080"/>
           </a:xfrm>
           <a:prstGeom prst="rect">
             <a:avLst/>
@@ -5289,22 +5237,22 @@
               </a:rPr>
               <a:t>SUBTITLE2</a:t>
             </a:r>
-            <a:endParaRPr b="0" lang="ru-RU" sz="1400" spc="-1" strike="noStrike">
-              <a:latin typeface="Arial"/>
-            </a:endParaRPr>
-          </a:p>
-        </p:txBody>
-      </p:sp>
-      <p:sp>
-        <p:nvSpPr>
-          <p:cNvPr id="76" name="TextBox 10"/>
+            <a:endParaRPr b="0" lang="en-US" sz="1400" spc="-1" strike="noStrike">
+              <a:latin typeface="Arial"/>
+            </a:endParaRPr>
+          </a:p>
+        </p:txBody>
+      </p:sp>
+      <p:sp>
+        <p:nvSpPr>
+          <p:cNvPr id="75" name="TextBox 10"/>
           <p:cNvSpPr/>
           <p:nvPr/>
         </p:nvSpPr>
         <p:spPr>
           <a:xfrm>
             <a:off x="578160" y="2687040"/>
-            <a:ext cx="3693240" cy="843120"/>
+            <a:ext cx="3692880" cy="842760"/>
           </a:xfrm>
           <a:prstGeom prst="rect">
             <a:avLst/>
@@ -5351,22 +5299,22 @@
               </a:rPr>
               <a:t>2</a:t>
             </a:r>
-            <a:endParaRPr b="0" lang="ru-RU" sz="1100" spc="-1" strike="noStrike">
-              <a:latin typeface="Arial"/>
-            </a:endParaRPr>
-          </a:p>
-        </p:txBody>
-      </p:sp>
-      <p:sp>
-        <p:nvSpPr>
-          <p:cNvPr id="77" name="TextBox 10"/>
+            <a:endParaRPr b="0" lang="en-US" sz="1100" spc="-1" strike="noStrike">
+              <a:latin typeface="Arial"/>
+            </a:endParaRPr>
+          </a:p>
+        </p:txBody>
+      </p:sp>
+      <p:sp>
+        <p:nvSpPr>
+          <p:cNvPr id="76" name="TextBox 10"/>
           <p:cNvSpPr/>
           <p:nvPr/>
         </p:nvSpPr>
         <p:spPr>
           <a:xfrm>
             <a:off x="578160" y="3482280"/>
-            <a:ext cx="3693240" cy="550440"/>
+            <a:ext cx="3692880" cy="550080"/>
           </a:xfrm>
           <a:prstGeom prst="rect">
             <a:avLst/>
@@ -5403,22 +5351,22 @@
               </a:rPr>
               <a:t>SUBTITLE3</a:t>
             </a:r>
-            <a:endParaRPr b="0" lang="ru-RU" sz="1400" spc="-1" strike="noStrike">
-              <a:latin typeface="Arial"/>
-            </a:endParaRPr>
-          </a:p>
-        </p:txBody>
-      </p:sp>
-      <p:sp>
-        <p:nvSpPr>
-          <p:cNvPr id="78" name="TextBox 10"/>
+            <a:endParaRPr b="0" lang="en-US" sz="1400" spc="-1" strike="noStrike">
+              <a:latin typeface="Arial"/>
+            </a:endParaRPr>
+          </a:p>
+        </p:txBody>
+      </p:sp>
+      <p:sp>
+        <p:nvSpPr>
+          <p:cNvPr id="77" name="TextBox 10"/>
           <p:cNvSpPr/>
           <p:nvPr/>
         </p:nvSpPr>
         <p:spPr>
           <a:xfrm>
             <a:off x="578160" y="4015080"/>
-            <a:ext cx="3693240" cy="794520"/>
+            <a:ext cx="3692880" cy="794160"/>
           </a:xfrm>
           <a:prstGeom prst="rect">
             <a:avLst/>
@@ -5465,22 +5413,22 @@
               </a:rPr>
               <a:t>3</a:t>
             </a:r>
-            <a:endParaRPr b="0" lang="ru-RU" sz="1100" spc="-1" strike="noStrike">
-              <a:latin typeface="Arial"/>
-            </a:endParaRPr>
-          </a:p>
-        </p:txBody>
-      </p:sp>
-      <p:sp>
-        <p:nvSpPr>
-          <p:cNvPr id="79" name="TextBox 30"/>
+            <a:endParaRPr b="0" lang="en-US" sz="1100" spc="-1" strike="noStrike">
+              <a:latin typeface="Arial"/>
+            </a:endParaRPr>
+          </a:p>
+        </p:txBody>
+      </p:sp>
+      <p:sp>
+        <p:nvSpPr>
+          <p:cNvPr id="78" name="TextBox 30"/>
           <p:cNvSpPr/>
           <p:nvPr/>
         </p:nvSpPr>
         <p:spPr>
           <a:xfrm>
             <a:off x="553680" y="352440"/>
-            <a:ext cx="3803400" cy="789480"/>
+            <a:ext cx="3803040" cy="789120"/>
           </a:xfrm>
           <a:prstGeom prst="rect">
             <a:avLst/>
@@ -5517,7 +5465,7 @@
               </a:rPr>
               <a:t>TITLE</a:t>
             </a:r>
-            <a:endParaRPr b="0" lang="ru-RU" sz="2200" spc="-1" strike="noStrike">
+            <a:endParaRPr b="0" lang="en-US" sz="2200" spc="-1" strike="noStrike">
               <a:latin typeface="Arial"/>
             </a:endParaRPr>
           </a:p>
@@ -5562,14 +5510,14 @@
       </p:grpSpPr>
       <p:sp>
         <p:nvSpPr>
-          <p:cNvPr id="80" name="TextBox 20"/>
+          <p:cNvPr id="79" name="TextBox 20"/>
           <p:cNvSpPr/>
           <p:nvPr/>
         </p:nvSpPr>
         <p:spPr>
           <a:xfrm>
             <a:off x="516960" y="411840"/>
-            <a:ext cx="8465400" cy="480600"/>
+            <a:ext cx="8465040" cy="480240"/>
           </a:xfrm>
           <a:prstGeom prst="rect">
             <a:avLst/>
@@ -5606,22 +5554,22 @@
               </a:rPr>
               <a:t>TITLE</a:t>
             </a:r>
-            <a:endParaRPr b="0" lang="ru-RU" sz="2200" spc="-1" strike="noStrike">
-              <a:latin typeface="Arial"/>
-            </a:endParaRPr>
-          </a:p>
-        </p:txBody>
-      </p:sp>
-      <p:sp>
-        <p:nvSpPr>
-          <p:cNvPr id="81" name="Прямоугольник со скругленными углами 3"/>
+            <a:endParaRPr b="0" lang="en-US" sz="2200" spc="-1" strike="noStrike">
+              <a:latin typeface="Arial"/>
+            </a:endParaRPr>
+          </a:p>
+        </p:txBody>
+      </p:sp>
+      <p:sp>
+        <p:nvSpPr>
+          <p:cNvPr id="80" name="Прямоугольник со скругленными углами 3"/>
           <p:cNvSpPr/>
           <p:nvPr/>
         </p:nvSpPr>
         <p:spPr>
           <a:xfrm>
             <a:off x="456480" y="1406160"/>
-            <a:ext cx="2300400" cy="1439640"/>
+            <a:ext cx="2300040" cy="1439280"/>
           </a:xfrm>
           <a:prstGeom prst="roundRect">
             <a:avLst>
@@ -5672,22 +5620,22 @@
               </a:rPr>
               <a:t>PIC</a:t>
             </a:r>
-            <a:endParaRPr b="0" lang="ru-RU" sz="1800" spc="-1" strike="noStrike">
-              <a:latin typeface="Arial"/>
-            </a:endParaRPr>
-          </a:p>
-        </p:txBody>
-      </p:sp>
-      <p:sp>
-        <p:nvSpPr>
-          <p:cNvPr id="82" name="TextBox 10"/>
+            <a:endParaRPr b="0" lang="en-US" sz="1800" spc="-1" strike="noStrike">
+              <a:latin typeface="Arial"/>
+            </a:endParaRPr>
+          </a:p>
+        </p:txBody>
+      </p:sp>
+      <p:sp>
+        <p:nvSpPr>
+          <p:cNvPr id="81" name="TextBox 10"/>
           <p:cNvSpPr/>
           <p:nvPr/>
         </p:nvSpPr>
         <p:spPr>
           <a:xfrm>
             <a:off x="384840" y="3013560"/>
-            <a:ext cx="2428920" cy="713520"/>
+            <a:ext cx="2428560" cy="713160"/>
           </a:xfrm>
           <a:prstGeom prst="rect">
             <a:avLst/>
@@ -5724,22 +5672,22 @@
               </a:rPr>
               <a:t>SUBTITLE1</a:t>
             </a:r>
-            <a:endParaRPr b="0" lang="ru-RU" sz="1400" spc="-1" strike="noStrike">
-              <a:latin typeface="Arial"/>
-            </a:endParaRPr>
-          </a:p>
-        </p:txBody>
-      </p:sp>
-      <p:sp>
-        <p:nvSpPr>
-          <p:cNvPr id="83" name="TextBox 10"/>
+            <a:endParaRPr b="0" lang="en-US" sz="1400" spc="-1" strike="noStrike">
+              <a:latin typeface="Arial"/>
+            </a:endParaRPr>
+          </a:p>
+        </p:txBody>
+      </p:sp>
+      <p:sp>
+        <p:nvSpPr>
+          <p:cNvPr id="82" name="TextBox 10"/>
           <p:cNvSpPr/>
           <p:nvPr/>
         </p:nvSpPr>
         <p:spPr>
           <a:xfrm>
             <a:off x="384840" y="3798000"/>
-            <a:ext cx="2428920" cy="1037520"/>
+            <a:ext cx="2428560" cy="1037160"/>
           </a:xfrm>
           <a:prstGeom prst="rect">
             <a:avLst/>
@@ -5786,22 +5734,22 @@
               </a:rPr>
               <a:t>1</a:t>
             </a:r>
-            <a:endParaRPr b="0" lang="ru-RU" sz="1100" spc="-1" strike="noStrike">
-              <a:latin typeface="Arial"/>
-            </a:endParaRPr>
-          </a:p>
-        </p:txBody>
-      </p:sp>
-      <p:sp>
-        <p:nvSpPr>
-          <p:cNvPr id="84" name="Прямоугольник: скругленные углы 1"/>
+            <a:endParaRPr b="0" lang="en-US" sz="1100" spc="-1" strike="noStrike">
+              <a:latin typeface="Arial"/>
+            </a:endParaRPr>
+          </a:p>
+        </p:txBody>
+      </p:sp>
+      <p:sp>
+        <p:nvSpPr>
+          <p:cNvPr id="83" name="Прямоугольник: скругленные углы 1"/>
           <p:cNvSpPr/>
           <p:nvPr/>
         </p:nvSpPr>
         <p:spPr>
           <a:xfrm>
             <a:off x="328680" y="228600"/>
-            <a:ext cx="8501040" cy="813600"/>
+            <a:ext cx="8500680" cy="813240"/>
           </a:xfrm>
           <a:prstGeom prst="roundRect">
             <a:avLst>
@@ -5832,14 +5780,14 @@
       </p:sp>
       <p:sp>
         <p:nvSpPr>
-          <p:cNvPr id="85" name="Прямоугольник: скругленные углы 10"/>
+          <p:cNvPr id="84" name="Прямоугольник: скругленные углы 10"/>
           <p:cNvSpPr/>
           <p:nvPr/>
         </p:nvSpPr>
         <p:spPr>
           <a:xfrm>
             <a:off x="328680" y="1279080"/>
-            <a:ext cx="2556720" cy="3642480"/>
+            <a:ext cx="2556360" cy="3642120"/>
           </a:xfrm>
           <a:prstGeom prst="roundRect">
             <a:avLst>
@@ -5870,14 +5818,14 @@
       </p:sp>
       <p:sp>
         <p:nvSpPr>
-          <p:cNvPr id="86" name="Прямоугольник со скругленными углами 3"/>
+          <p:cNvPr id="85" name="Прямоугольник со скругленными углами 3"/>
           <p:cNvSpPr/>
           <p:nvPr/>
         </p:nvSpPr>
         <p:spPr>
           <a:xfrm>
             <a:off x="3421080" y="1398960"/>
-            <a:ext cx="2300400" cy="1439640"/>
+            <a:ext cx="2300040" cy="1439280"/>
           </a:xfrm>
           <a:prstGeom prst="roundRect">
             <a:avLst>
@@ -5928,22 +5876,22 @@
               </a:rPr>
               <a:t>PIC</a:t>
             </a:r>
-            <a:endParaRPr b="0" lang="ru-RU" sz="1800" spc="-1" strike="noStrike">
-              <a:latin typeface="Arial"/>
-            </a:endParaRPr>
-          </a:p>
-        </p:txBody>
-      </p:sp>
-      <p:sp>
-        <p:nvSpPr>
-          <p:cNvPr id="87" name="TextBox 10"/>
+            <a:endParaRPr b="0" lang="en-US" sz="1800" spc="-1" strike="noStrike">
+              <a:latin typeface="Arial"/>
+            </a:endParaRPr>
+          </a:p>
+        </p:txBody>
+      </p:sp>
+      <p:sp>
+        <p:nvSpPr>
+          <p:cNvPr id="86" name="TextBox 10"/>
           <p:cNvSpPr/>
           <p:nvPr/>
         </p:nvSpPr>
         <p:spPr>
           <a:xfrm>
             <a:off x="3349440" y="3013560"/>
-            <a:ext cx="2428920" cy="713520"/>
+            <a:ext cx="2428560" cy="713160"/>
           </a:xfrm>
           <a:prstGeom prst="rect">
             <a:avLst/>
@@ -5990,22 +5938,22 @@
               </a:rPr>
               <a:t>2</a:t>
             </a:r>
-            <a:endParaRPr b="0" lang="ru-RU" sz="1400" spc="-1" strike="noStrike">
-              <a:latin typeface="Arial"/>
-            </a:endParaRPr>
-          </a:p>
-        </p:txBody>
-      </p:sp>
-      <p:sp>
-        <p:nvSpPr>
-          <p:cNvPr id="88" name="TextBox 10"/>
+            <a:endParaRPr b="0" lang="en-US" sz="1400" spc="-1" strike="noStrike">
+              <a:latin typeface="Arial"/>
+            </a:endParaRPr>
+          </a:p>
+        </p:txBody>
+      </p:sp>
+      <p:sp>
+        <p:nvSpPr>
+          <p:cNvPr id="87" name="TextBox 10"/>
           <p:cNvSpPr/>
           <p:nvPr/>
         </p:nvSpPr>
         <p:spPr>
           <a:xfrm>
             <a:off x="3349440" y="3798000"/>
-            <a:ext cx="2428920" cy="1037520"/>
+            <a:ext cx="2428560" cy="1037160"/>
           </a:xfrm>
           <a:prstGeom prst="rect">
             <a:avLst/>
@@ -6052,22 +6000,22 @@
               </a:rPr>
               <a:t>2</a:t>
             </a:r>
-            <a:endParaRPr b="0" lang="ru-RU" sz="1100" spc="-1" strike="noStrike">
-              <a:latin typeface="Arial"/>
-            </a:endParaRPr>
-          </a:p>
-        </p:txBody>
-      </p:sp>
-      <p:sp>
-        <p:nvSpPr>
-          <p:cNvPr id="89" name="Прямоугольник: скругленные углы 14"/>
+            <a:endParaRPr b="0" lang="en-US" sz="1100" spc="-1" strike="noStrike">
+              <a:latin typeface="Arial"/>
+            </a:endParaRPr>
+          </a:p>
+        </p:txBody>
+      </p:sp>
+      <p:sp>
+        <p:nvSpPr>
+          <p:cNvPr id="88" name="Прямоугольник: скругленные углы 14"/>
           <p:cNvSpPr/>
           <p:nvPr/>
         </p:nvSpPr>
         <p:spPr>
           <a:xfrm>
             <a:off x="3293280" y="1271880"/>
-            <a:ext cx="2556720" cy="3642480"/>
+            <a:ext cx="2556360" cy="3642120"/>
           </a:xfrm>
           <a:prstGeom prst="roundRect">
             <a:avLst>
@@ -6098,14 +6046,14 @@
       </p:sp>
       <p:sp>
         <p:nvSpPr>
-          <p:cNvPr id="90" name="Прямоугольник со скругленными углами 3"/>
+          <p:cNvPr id="89" name="Прямоугольник со скругленными углами 3"/>
           <p:cNvSpPr/>
           <p:nvPr/>
         </p:nvSpPr>
         <p:spPr>
           <a:xfrm>
             <a:off x="6400800" y="1379520"/>
-            <a:ext cx="2300400" cy="1439640"/>
+            <a:ext cx="2300040" cy="1439280"/>
           </a:xfrm>
           <a:prstGeom prst="roundRect">
             <a:avLst>
@@ -6156,22 +6104,22 @@
               </a:rPr>
               <a:t>PIC</a:t>
             </a:r>
-            <a:endParaRPr b="0" lang="ru-RU" sz="1800" spc="-1" strike="noStrike">
-              <a:latin typeface="Arial"/>
-            </a:endParaRPr>
-          </a:p>
-        </p:txBody>
-      </p:sp>
-      <p:sp>
-        <p:nvSpPr>
-          <p:cNvPr id="91" name="TextBox 10"/>
+            <a:endParaRPr b="0" lang="en-US" sz="1800" spc="-1" strike="noStrike">
+              <a:latin typeface="Arial"/>
+            </a:endParaRPr>
+          </a:p>
+        </p:txBody>
+      </p:sp>
+      <p:sp>
+        <p:nvSpPr>
+          <p:cNvPr id="90" name="TextBox 10"/>
           <p:cNvSpPr/>
           <p:nvPr/>
         </p:nvSpPr>
         <p:spPr>
           <a:xfrm>
             <a:off x="6329520" y="3013560"/>
-            <a:ext cx="2428920" cy="713520"/>
+            <a:ext cx="2428560" cy="713160"/>
           </a:xfrm>
           <a:prstGeom prst="rect">
             <a:avLst/>
@@ -6218,22 +6166,22 @@
               </a:rPr>
               <a:t>3</a:t>
             </a:r>
-            <a:endParaRPr b="0" lang="ru-RU" sz="1400" spc="-1" strike="noStrike">
-              <a:latin typeface="Arial"/>
-            </a:endParaRPr>
-          </a:p>
-        </p:txBody>
-      </p:sp>
-      <p:sp>
-        <p:nvSpPr>
-          <p:cNvPr id="92" name="TextBox 10"/>
+            <a:endParaRPr b="0" lang="en-US" sz="1400" spc="-1" strike="noStrike">
+              <a:latin typeface="Arial"/>
+            </a:endParaRPr>
+          </a:p>
+        </p:txBody>
+      </p:sp>
+      <p:sp>
+        <p:nvSpPr>
+          <p:cNvPr id="91" name="TextBox 10"/>
           <p:cNvSpPr/>
           <p:nvPr/>
         </p:nvSpPr>
         <p:spPr>
           <a:xfrm>
             <a:off x="6329520" y="3798000"/>
-            <a:ext cx="2428920" cy="1037520"/>
+            <a:ext cx="2428560" cy="1037160"/>
           </a:xfrm>
           <a:prstGeom prst="rect">
             <a:avLst/>
@@ -6280,22 +6228,22 @@
               </a:rPr>
               <a:t>3</a:t>
             </a:r>
-            <a:endParaRPr b="0" lang="ru-RU" sz="1100" spc="-1" strike="noStrike">
-              <a:latin typeface="Arial"/>
-            </a:endParaRPr>
-          </a:p>
-        </p:txBody>
-      </p:sp>
-      <p:sp>
-        <p:nvSpPr>
-          <p:cNvPr id="93" name="Прямоугольник: скругленные углы 19"/>
+            <a:endParaRPr b="0" lang="en-US" sz="1100" spc="-1" strike="noStrike">
+              <a:latin typeface="Arial"/>
+            </a:endParaRPr>
+          </a:p>
+        </p:txBody>
+      </p:sp>
+      <p:sp>
+        <p:nvSpPr>
+          <p:cNvPr id="92" name="Прямоугольник: скругленные углы 19"/>
           <p:cNvSpPr/>
           <p:nvPr/>
         </p:nvSpPr>
         <p:spPr>
           <a:xfrm>
             <a:off x="6273000" y="1252800"/>
-            <a:ext cx="2556720" cy="3642480"/>
+            <a:ext cx="2556360" cy="3642120"/>
           </a:xfrm>
           <a:prstGeom prst="roundRect">
             <a:avLst>
@@ -6363,14 +6311,14 @@
       </p:grpSpPr>
       <p:sp>
         <p:nvSpPr>
-          <p:cNvPr id="94" name="Прямоугольник со скругленными углами 3"/>
+          <p:cNvPr id="93" name="Прямоугольник со скругленными углами 3"/>
           <p:cNvSpPr/>
           <p:nvPr/>
         </p:nvSpPr>
         <p:spPr>
           <a:xfrm>
             <a:off x="0" y="0"/>
-            <a:ext cx="3396600" cy="5142960"/>
+            <a:ext cx="3396240" cy="5142600"/>
           </a:xfrm>
           <a:prstGeom prst="roundRect">
             <a:avLst>
@@ -6421,22 +6369,22 @@
               </a:rPr>
               <a:t>PIC</a:t>
             </a:r>
-            <a:endParaRPr b="0" lang="ru-RU" sz="1800" spc="-1" strike="noStrike">
-              <a:latin typeface="Arial"/>
-            </a:endParaRPr>
-          </a:p>
-        </p:txBody>
-      </p:sp>
-      <p:sp>
-        <p:nvSpPr>
-          <p:cNvPr id="95" name="TextBox 10"/>
+            <a:endParaRPr b="0" lang="en-US" sz="1800" spc="-1" strike="noStrike">
+              <a:latin typeface="Arial"/>
+            </a:endParaRPr>
+          </a:p>
+        </p:txBody>
+      </p:sp>
+      <p:sp>
+        <p:nvSpPr>
+          <p:cNvPr id="94" name="TextBox 10"/>
           <p:cNvSpPr/>
           <p:nvPr/>
         </p:nvSpPr>
         <p:spPr>
           <a:xfrm>
             <a:off x="4192560" y="3830040"/>
-            <a:ext cx="4672080" cy="328680"/>
+            <a:ext cx="4671720" cy="328320"/>
           </a:xfrm>
           <a:prstGeom prst="rect">
             <a:avLst/>
@@ -6473,22 +6421,22 @@
               </a:rPr>
               <a:t>SUBTITLE3</a:t>
             </a:r>
-            <a:endParaRPr b="0" lang="ru-RU" sz="1400" spc="-1" strike="noStrike">
-              <a:latin typeface="Arial"/>
-            </a:endParaRPr>
-          </a:p>
-        </p:txBody>
-      </p:sp>
-      <p:sp>
-        <p:nvSpPr>
-          <p:cNvPr id="96" name="TextBox 10"/>
+            <a:endParaRPr b="0" lang="en-US" sz="1400" spc="-1" strike="noStrike">
+              <a:latin typeface="Arial"/>
+            </a:endParaRPr>
+          </a:p>
+        </p:txBody>
+      </p:sp>
+      <p:sp>
+        <p:nvSpPr>
+          <p:cNvPr id="95" name="TextBox 10"/>
           <p:cNvSpPr/>
           <p:nvPr/>
         </p:nvSpPr>
         <p:spPr>
           <a:xfrm>
             <a:off x="4192560" y="4188600"/>
-            <a:ext cx="4672080" cy="713520"/>
+            <a:ext cx="4671720" cy="713160"/>
           </a:xfrm>
           <a:prstGeom prst="rect">
             <a:avLst/>
@@ -6535,22 +6483,22 @@
               </a:rPr>
               <a:t>3</a:t>
             </a:r>
-            <a:endParaRPr b="0" lang="ru-RU" sz="1100" spc="-1" strike="noStrike">
-              <a:latin typeface="Arial"/>
-            </a:endParaRPr>
-          </a:p>
-        </p:txBody>
-      </p:sp>
-      <p:sp>
-        <p:nvSpPr>
-          <p:cNvPr id="97" name="Овал 9"/>
+            <a:endParaRPr b="0" lang="en-US" sz="1100" spc="-1" strike="noStrike">
+              <a:latin typeface="Arial"/>
+            </a:endParaRPr>
+          </a:p>
+        </p:txBody>
+      </p:sp>
+      <p:sp>
+        <p:nvSpPr>
+          <p:cNvPr id="96" name="Овал 9"/>
           <p:cNvSpPr/>
           <p:nvPr/>
         </p:nvSpPr>
         <p:spPr>
           <a:xfrm>
             <a:off x="3724560" y="3830040"/>
-            <a:ext cx="402840" cy="402840"/>
+            <a:ext cx="402480" cy="402480"/>
           </a:xfrm>
           <a:prstGeom prst="ellipse">
             <a:avLst/>
@@ -6597,22 +6545,22 @@
               </a:rPr>
               <a:t>03</a:t>
             </a:r>
-            <a:endParaRPr b="0" lang="ru-RU" sz="800" spc="-1" strike="noStrike">
-              <a:latin typeface="Arial"/>
-            </a:endParaRPr>
-          </a:p>
-        </p:txBody>
-      </p:sp>
-      <p:sp>
-        <p:nvSpPr>
-          <p:cNvPr id="98" name="TextBox 10"/>
+            <a:endParaRPr b="0" lang="en-US" sz="800" spc="-1" strike="noStrike">
+              <a:latin typeface="Arial"/>
+            </a:endParaRPr>
+          </a:p>
+        </p:txBody>
+      </p:sp>
+      <p:sp>
+        <p:nvSpPr>
+          <p:cNvPr id="97" name="TextBox 10"/>
           <p:cNvSpPr/>
           <p:nvPr/>
         </p:nvSpPr>
         <p:spPr>
           <a:xfrm>
             <a:off x="4192560" y="2571840"/>
-            <a:ext cx="4672080" cy="328680"/>
+            <a:ext cx="4671720" cy="328320"/>
           </a:xfrm>
           <a:prstGeom prst="rect">
             <a:avLst/>
@@ -6659,22 +6607,22 @@
               </a:rPr>
               <a:t>2</a:t>
             </a:r>
-            <a:endParaRPr b="0" lang="ru-RU" sz="1400" spc="-1" strike="noStrike">
-              <a:latin typeface="Arial"/>
-            </a:endParaRPr>
-          </a:p>
-        </p:txBody>
-      </p:sp>
-      <p:sp>
-        <p:nvSpPr>
-          <p:cNvPr id="99" name="TextBox 10"/>
+            <a:endParaRPr b="0" lang="en-US" sz="1400" spc="-1" strike="noStrike">
+              <a:latin typeface="Arial"/>
+            </a:endParaRPr>
+          </a:p>
+        </p:txBody>
+      </p:sp>
+      <p:sp>
+        <p:nvSpPr>
+          <p:cNvPr id="98" name="TextBox 10"/>
           <p:cNvSpPr/>
           <p:nvPr/>
         </p:nvSpPr>
         <p:spPr>
           <a:xfrm>
             <a:off x="4192560" y="2930400"/>
-            <a:ext cx="4672080" cy="713520"/>
+            <a:ext cx="4671720" cy="713160"/>
           </a:xfrm>
           <a:prstGeom prst="rect">
             <a:avLst/>
@@ -6721,22 +6669,22 @@
               </a:rPr>
               <a:t>2</a:t>
             </a:r>
-            <a:endParaRPr b="0" lang="ru-RU" sz="1100" spc="-1" strike="noStrike">
-              <a:latin typeface="Arial"/>
-            </a:endParaRPr>
-          </a:p>
-        </p:txBody>
-      </p:sp>
-      <p:sp>
-        <p:nvSpPr>
-          <p:cNvPr id="100" name="Овал 13"/>
+            <a:endParaRPr b="0" lang="en-US" sz="1100" spc="-1" strike="noStrike">
+              <a:latin typeface="Arial"/>
+            </a:endParaRPr>
+          </a:p>
+        </p:txBody>
+      </p:sp>
+      <p:sp>
+        <p:nvSpPr>
+          <p:cNvPr id="99" name="Овал 13"/>
           <p:cNvSpPr/>
           <p:nvPr/>
         </p:nvSpPr>
         <p:spPr>
           <a:xfrm>
             <a:off x="3724560" y="2571840"/>
-            <a:ext cx="402840" cy="402840"/>
+            <a:ext cx="402480" cy="402480"/>
           </a:xfrm>
           <a:prstGeom prst="ellipse">
             <a:avLst/>
@@ -6783,22 +6731,22 @@
               </a:rPr>
               <a:t>02</a:t>
             </a:r>
-            <a:endParaRPr b="0" lang="ru-RU" sz="800" spc="-1" strike="noStrike">
-              <a:latin typeface="Arial"/>
-            </a:endParaRPr>
-          </a:p>
-        </p:txBody>
-      </p:sp>
-      <p:sp>
-        <p:nvSpPr>
-          <p:cNvPr id="101" name="TextBox 10"/>
+            <a:endParaRPr b="0" lang="en-US" sz="800" spc="-1" strike="noStrike">
+              <a:latin typeface="Arial"/>
+            </a:endParaRPr>
+          </a:p>
+        </p:txBody>
+      </p:sp>
+      <p:sp>
+        <p:nvSpPr>
+          <p:cNvPr id="100" name="TextBox 10"/>
           <p:cNvSpPr/>
           <p:nvPr/>
         </p:nvSpPr>
         <p:spPr>
           <a:xfrm>
             <a:off x="4192560" y="1311840"/>
-            <a:ext cx="4672080" cy="328680"/>
+            <a:ext cx="4671720" cy="328320"/>
           </a:xfrm>
           <a:prstGeom prst="rect">
             <a:avLst/>
@@ -6845,22 +6793,22 @@
               </a:rPr>
               <a:t>1</a:t>
             </a:r>
-            <a:endParaRPr b="0" lang="ru-RU" sz="1400" spc="-1" strike="noStrike">
-              <a:latin typeface="Arial"/>
-            </a:endParaRPr>
-          </a:p>
-        </p:txBody>
-      </p:sp>
-      <p:sp>
-        <p:nvSpPr>
-          <p:cNvPr id="102" name="TextBox 10"/>
+            <a:endParaRPr b="0" lang="en-US" sz="1400" spc="-1" strike="noStrike">
+              <a:latin typeface="Arial"/>
+            </a:endParaRPr>
+          </a:p>
+        </p:txBody>
+      </p:sp>
+      <p:sp>
+        <p:nvSpPr>
+          <p:cNvPr id="101" name="TextBox 10"/>
           <p:cNvSpPr/>
           <p:nvPr/>
         </p:nvSpPr>
         <p:spPr>
           <a:xfrm>
             <a:off x="4192560" y="1670760"/>
-            <a:ext cx="4672080" cy="713520"/>
+            <a:ext cx="4671720" cy="713160"/>
           </a:xfrm>
           <a:prstGeom prst="rect">
             <a:avLst/>
@@ -6907,22 +6855,22 @@
               </a:rPr>
               <a:t>1</a:t>
             </a:r>
-            <a:endParaRPr b="0" lang="ru-RU" sz="1100" spc="-1" strike="noStrike">
-              <a:latin typeface="Arial"/>
-            </a:endParaRPr>
-          </a:p>
-        </p:txBody>
-      </p:sp>
-      <p:sp>
-        <p:nvSpPr>
-          <p:cNvPr id="103" name="Овал 16"/>
+            <a:endParaRPr b="0" lang="en-US" sz="1100" spc="-1" strike="noStrike">
+              <a:latin typeface="Arial"/>
+            </a:endParaRPr>
+          </a:p>
+        </p:txBody>
+      </p:sp>
+      <p:sp>
+        <p:nvSpPr>
+          <p:cNvPr id="102" name="Овал 16"/>
           <p:cNvSpPr/>
           <p:nvPr/>
         </p:nvSpPr>
         <p:spPr>
           <a:xfrm>
             <a:off x="3724560" y="1311840"/>
-            <a:ext cx="402840" cy="402840"/>
+            <a:ext cx="402480" cy="402480"/>
           </a:xfrm>
           <a:prstGeom prst="ellipse">
             <a:avLst/>
@@ -6969,22 +6917,22 @@
               </a:rPr>
               <a:t>01</a:t>
             </a:r>
-            <a:endParaRPr b="0" lang="ru-RU" sz="800" spc="-1" strike="noStrike">
-              <a:latin typeface="Arial"/>
-            </a:endParaRPr>
-          </a:p>
-        </p:txBody>
-      </p:sp>
-      <p:sp>
-        <p:nvSpPr>
-          <p:cNvPr id="104" name="TextBox 17"/>
+            <a:endParaRPr b="0" lang="en-US" sz="800" spc="-1" strike="noStrike">
+              <a:latin typeface="Arial"/>
+            </a:endParaRPr>
+          </a:p>
+        </p:txBody>
+      </p:sp>
+      <p:sp>
+        <p:nvSpPr>
+          <p:cNvPr id="103" name="TextBox 17"/>
           <p:cNvSpPr/>
           <p:nvPr/>
         </p:nvSpPr>
         <p:spPr>
           <a:xfrm>
             <a:off x="3607560" y="215280"/>
-            <a:ext cx="5374800" cy="909360"/>
+            <a:ext cx="5374440" cy="909000"/>
           </a:xfrm>
           <a:prstGeom prst="rect">
             <a:avLst/>
@@ -7021,7 +6969,7 @@
               </a:rPr>
               <a:t>TITLE</a:t>
             </a:r>
-            <a:endParaRPr b="0" lang="ru-RU" sz="2200" spc="-1" strike="noStrike">
+            <a:endParaRPr b="0" lang="en-US" sz="2200" spc="-1" strike="noStrike">
               <a:latin typeface="Arial"/>
             </a:endParaRPr>
           </a:p>
@@ -7066,14 +7014,14 @@
       </p:grpSpPr>
       <p:sp>
         <p:nvSpPr>
-          <p:cNvPr id="105" name="Прямоугольник: скругленные углы 22"/>
+          <p:cNvPr id="104" name="Прямоугольник: скругленные углы 22"/>
           <p:cNvSpPr/>
           <p:nvPr/>
         </p:nvSpPr>
         <p:spPr>
           <a:xfrm>
             <a:off x="3417120" y="1051560"/>
-            <a:ext cx="5047560" cy="841320"/>
+            <a:ext cx="5047200" cy="840960"/>
           </a:xfrm>
           <a:prstGeom prst="roundRect">
             <a:avLst>
@@ -7104,14 +7052,14 @@
       </p:sp>
       <p:sp>
         <p:nvSpPr>
-          <p:cNvPr id="106" name="Прямоугольник: скругленные углы 28"/>
+          <p:cNvPr id="105" name="Прямоугольник: скругленные углы 28"/>
           <p:cNvSpPr/>
           <p:nvPr/>
         </p:nvSpPr>
         <p:spPr>
           <a:xfrm>
             <a:off x="3417120" y="2451960"/>
-            <a:ext cx="5047560" cy="841320"/>
+            <a:ext cx="5047200" cy="840960"/>
           </a:xfrm>
           <a:prstGeom prst="roundRect">
             <a:avLst>
@@ -7142,14 +7090,14 @@
       </p:sp>
       <p:sp>
         <p:nvSpPr>
-          <p:cNvPr id="107" name="Прямоугольник: скругленные углы 32"/>
+          <p:cNvPr id="106" name="Прямоугольник: скругленные углы 32"/>
           <p:cNvSpPr/>
           <p:nvPr/>
         </p:nvSpPr>
         <p:spPr>
           <a:xfrm>
             <a:off x="3417120" y="3849840"/>
-            <a:ext cx="5047560" cy="841320"/>
+            <a:ext cx="5047200" cy="840960"/>
           </a:xfrm>
           <a:prstGeom prst="roundRect">
             <a:avLst>
@@ -7180,14 +7128,14 @@
       </p:sp>
       <p:sp>
         <p:nvSpPr>
-          <p:cNvPr id="108" name="TextBox 10"/>
+          <p:cNvPr id="107" name="TextBox 10"/>
           <p:cNvSpPr/>
           <p:nvPr/>
         </p:nvSpPr>
         <p:spPr>
           <a:xfrm>
             <a:off x="3821760" y="1115280"/>
-            <a:ext cx="4483440" cy="713520"/>
+            <a:ext cx="4483080" cy="713160"/>
           </a:xfrm>
           <a:prstGeom prst="rect">
             <a:avLst/>
@@ -7234,15 +7182,15 @@
               </a:rPr>
               <a:t>1</a:t>
             </a:r>
-            <a:endParaRPr b="0" lang="ru-RU" sz="1100" spc="-1" strike="noStrike">
-              <a:latin typeface="Arial"/>
-            </a:endParaRPr>
-          </a:p>
-        </p:txBody>
-      </p:sp>
-      <p:sp>
-        <p:nvSpPr>
-          <p:cNvPr id="109" name="Прямая соединительная линия 4"/>
+            <a:endParaRPr b="0" lang="en-US" sz="1100" spc="-1" strike="noStrike">
+              <a:latin typeface="Arial"/>
+            </a:endParaRPr>
+          </a:p>
+        </p:txBody>
+      </p:sp>
+      <p:sp>
+        <p:nvSpPr>
+          <p:cNvPr id="108" name="Прямая соединительная линия 4"/>
           <p:cNvSpPr/>
           <p:nvPr/>
         </p:nvSpPr>
@@ -7275,14 +7223,14 @@
       </p:sp>
       <p:sp>
         <p:nvSpPr>
-          <p:cNvPr id="110" name="Прямоугольник: скругленные углы 19"/>
+          <p:cNvPr id="109" name="Прямоугольник: скругленные углы 19"/>
           <p:cNvSpPr/>
           <p:nvPr/>
         </p:nvSpPr>
         <p:spPr>
           <a:xfrm>
             <a:off x="1135800" y="1033200"/>
-            <a:ext cx="2642400" cy="880560"/>
+            <a:ext cx="2642040" cy="880200"/>
           </a:xfrm>
           <a:prstGeom prst="roundRect">
             <a:avLst>
@@ -7313,14 +7261,14 @@
       </p:sp>
       <p:sp>
         <p:nvSpPr>
-          <p:cNvPr id="111" name="TextBox 10"/>
+          <p:cNvPr id="110" name="TextBox 10"/>
           <p:cNvSpPr/>
           <p:nvPr/>
         </p:nvSpPr>
         <p:spPr>
           <a:xfrm>
             <a:off x="1164600" y="1033200"/>
-            <a:ext cx="2545920" cy="880560"/>
+            <a:ext cx="2545560" cy="880200"/>
           </a:xfrm>
           <a:prstGeom prst="rect">
             <a:avLst/>
@@ -7367,22 +7315,22 @@
               </a:rPr>
               <a:t>1</a:t>
             </a:r>
-            <a:endParaRPr b="0" lang="ru-RU" sz="1400" spc="-1" strike="noStrike">
-              <a:latin typeface="Arial"/>
-            </a:endParaRPr>
-          </a:p>
-        </p:txBody>
-      </p:sp>
-      <p:sp>
-        <p:nvSpPr>
-          <p:cNvPr id="112" name="TextBox 10"/>
+            <a:endParaRPr b="0" lang="en-US" sz="1400" spc="-1" strike="noStrike">
+              <a:latin typeface="Arial"/>
+            </a:endParaRPr>
+          </a:p>
+        </p:txBody>
+      </p:sp>
+      <p:sp>
+        <p:nvSpPr>
+          <p:cNvPr id="111" name="TextBox 10"/>
           <p:cNvSpPr/>
           <p:nvPr/>
         </p:nvSpPr>
         <p:spPr>
           <a:xfrm>
             <a:off x="3821760" y="2515680"/>
-            <a:ext cx="4483440" cy="713520"/>
+            <a:ext cx="4483080" cy="713160"/>
           </a:xfrm>
           <a:prstGeom prst="rect">
             <a:avLst/>
@@ -7429,22 +7377,22 @@
               </a:rPr>
               <a:t>2</a:t>
             </a:r>
-            <a:endParaRPr b="0" lang="ru-RU" sz="1100" spc="-1" strike="noStrike">
-              <a:latin typeface="Arial"/>
-            </a:endParaRPr>
-          </a:p>
-        </p:txBody>
-      </p:sp>
-      <p:sp>
-        <p:nvSpPr>
-          <p:cNvPr id="113" name="Прямоугольник: скругленные углы 26"/>
+            <a:endParaRPr b="0" lang="en-US" sz="1100" spc="-1" strike="noStrike">
+              <a:latin typeface="Arial"/>
+            </a:endParaRPr>
+          </a:p>
+        </p:txBody>
+      </p:sp>
+      <p:sp>
+        <p:nvSpPr>
+          <p:cNvPr id="112" name="Прямоугольник: скругленные углы 26"/>
           <p:cNvSpPr/>
           <p:nvPr/>
         </p:nvSpPr>
         <p:spPr>
           <a:xfrm>
             <a:off x="1135800" y="2433600"/>
-            <a:ext cx="2642400" cy="880560"/>
+            <a:ext cx="2642040" cy="880200"/>
           </a:xfrm>
           <a:prstGeom prst="roundRect">
             <a:avLst>
@@ -7475,14 +7423,14 @@
       </p:sp>
       <p:sp>
         <p:nvSpPr>
-          <p:cNvPr id="114" name="TextBox 10"/>
+          <p:cNvPr id="113" name="TextBox 10"/>
           <p:cNvSpPr/>
           <p:nvPr/>
         </p:nvSpPr>
         <p:spPr>
           <a:xfrm>
             <a:off x="1164600" y="2433600"/>
-            <a:ext cx="2545920" cy="880560"/>
+            <a:ext cx="2545560" cy="880200"/>
           </a:xfrm>
           <a:prstGeom prst="rect">
             <a:avLst/>
@@ -7529,22 +7477,22 @@
               </a:rPr>
               <a:t>2</a:t>
             </a:r>
-            <a:endParaRPr b="0" lang="ru-RU" sz="1400" spc="-1" strike="noStrike">
-              <a:latin typeface="Arial"/>
-            </a:endParaRPr>
-          </a:p>
-        </p:txBody>
-      </p:sp>
-      <p:sp>
-        <p:nvSpPr>
-          <p:cNvPr id="115" name="TextBox 10"/>
+            <a:endParaRPr b="0" lang="en-US" sz="1400" spc="-1" strike="noStrike">
+              <a:latin typeface="Arial"/>
+            </a:endParaRPr>
+          </a:p>
+        </p:txBody>
+      </p:sp>
+      <p:sp>
+        <p:nvSpPr>
+          <p:cNvPr id="114" name="TextBox 10"/>
           <p:cNvSpPr/>
           <p:nvPr/>
         </p:nvSpPr>
         <p:spPr>
           <a:xfrm>
             <a:off x="3821760" y="3913560"/>
-            <a:ext cx="4483440" cy="713520"/>
+            <a:ext cx="4483080" cy="713160"/>
           </a:xfrm>
           <a:prstGeom prst="rect">
             <a:avLst/>
@@ -7591,22 +7539,22 @@
               </a:rPr>
               <a:t>3</a:t>
             </a:r>
-            <a:endParaRPr b="0" lang="ru-RU" sz="1100" spc="-1" strike="noStrike">
-              <a:latin typeface="Arial"/>
-            </a:endParaRPr>
-          </a:p>
-        </p:txBody>
-      </p:sp>
-      <p:sp>
-        <p:nvSpPr>
-          <p:cNvPr id="116" name="Прямоугольник: скругленные углы 30"/>
+            <a:endParaRPr b="0" lang="en-US" sz="1100" spc="-1" strike="noStrike">
+              <a:latin typeface="Arial"/>
+            </a:endParaRPr>
+          </a:p>
+        </p:txBody>
+      </p:sp>
+      <p:sp>
+        <p:nvSpPr>
+          <p:cNvPr id="115" name="Прямоугольник: скругленные углы 30"/>
           <p:cNvSpPr/>
           <p:nvPr/>
         </p:nvSpPr>
         <p:spPr>
           <a:xfrm>
             <a:off x="1135800" y="3831480"/>
-            <a:ext cx="2642400" cy="880560"/>
+            <a:ext cx="2642040" cy="880200"/>
           </a:xfrm>
           <a:prstGeom prst="roundRect">
             <a:avLst>
@@ -7637,14 +7585,14 @@
       </p:sp>
       <p:sp>
         <p:nvSpPr>
-          <p:cNvPr id="117" name="TextBox 10"/>
+          <p:cNvPr id="116" name="TextBox 10"/>
           <p:cNvSpPr/>
           <p:nvPr/>
         </p:nvSpPr>
         <p:spPr>
           <a:xfrm>
             <a:off x="1164600" y="3831480"/>
-            <a:ext cx="2545920" cy="880560"/>
+            <a:ext cx="2545560" cy="880200"/>
           </a:xfrm>
           <a:prstGeom prst="rect">
             <a:avLst/>
@@ -7691,22 +7639,22 @@
               </a:rPr>
               <a:t>3</a:t>
             </a:r>
-            <a:endParaRPr b="0" lang="ru-RU" sz="1400" spc="-1" strike="noStrike">
-              <a:latin typeface="Arial"/>
-            </a:endParaRPr>
-          </a:p>
-        </p:txBody>
-      </p:sp>
-      <p:sp>
-        <p:nvSpPr>
-          <p:cNvPr id="118" name="Овал 5"/>
+            <a:endParaRPr b="0" lang="en-US" sz="1400" spc="-1" strike="noStrike">
+              <a:latin typeface="Arial"/>
+            </a:endParaRPr>
+          </a:p>
+        </p:txBody>
+      </p:sp>
+      <p:sp>
+        <p:nvSpPr>
+          <p:cNvPr id="117" name="Овал 5"/>
           <p:cNvSpPr/>
           <p:nvPr/>
         </p:nvSpPr>
         <p:spPr>
           <a:xfrm>
             <a:off x="675360" y="1365840"/>
-            <a:ext cx="220680" cy="220680"/>
+            <a:ext cx="220320" cy="220320"/>
           </a:xfrm>
           <a:prstGeom prst="ellipse">
             <a:avLst/>
@@ -7740,14 +7688,14 @@
       </p:sp>
       <p:sp>
         <p:nvSpPr>
-          <p:cNvPr id="119" name="Овал 33"/>
+          <p:cNvPr id="118" name="Овал 33"/>
           <p:cNvSpPr/>
           <p:nvPr/>
         </p:nvSpPr>
         <p:spPr>
           <a:xfrm>
             <a:off x="675360" y="2728080"/>
-            <a:ext cx="220680" cy="220680"/>
+            <a:ext cx="220320" cy="220320"/>
           </a:xfrm>
           <a:prstGeom prst="ellipse">
             <a:avLst/>
@@ -7781,14 +7729,14 @@
       </p:sp>
       <p:sp>
         <p:nvSpPr>
-          <p:cNvPr id="120" name="Овал 34"/>
+          <p:cNvPr id="119" name="Овал 34"/>
           <p:cNvSpPr/>
           <p:nvPr/>
         </p:nvSpPr>
         <p:spPr>
           <a:xfrm>
             <a:off x="671760" y="4156200"/>
-            <a:ext cx="220680" cy="220680"/>
+            <a:ext cx="220320" cy="220320"/>
           </a:xfrm>
           <a:prstGeom prst="ellipse">
             <a:avLst/>
@@ -7822,14 +7770,14 @@
       </p:sp>
       <p:sp>
         <p:nvSpPr>
-          <p:cNvPr id="121" name="TextBox 20"/>
+          <p:cNvPr id="120" name="TextBox 20"/>
           <p:cNvSpPr/>
           <p:nvPr/>
         </p:nvSpPr>
         <p:spPr>
           <a:xfrm>
             <a:off x="381600" y="271080"/>
-            <a:ext cx="8465400" cy="480600"/>
+            <a:ext cx="8465040" cy="480240"/>
           </a:xfrm>
           <a:prstGeom prst="rect">
             <a:avLst/>
@@ -7866,7 +7814,7 @@
               </a:rPr>
               <a:t>TITLE</a:t>
             </a:r>
-            <a:endParaRPr b="0" lang="ru-RU" sz="2200" spc="-1" strike="noStrike">
+            <a:endParaRPr b="0" lang="en-US" sz="2200" spc="-1" strike="noStrike">
               <a:latin typeface="Arial"/>
             </a:endParaRPr>
           </a:p>
@@ -7911,14 +7859,14 @@
       </p:grpSpPr>
       <p:sp>
         <p:nvSpPr>
-          <p:cNvPr id="122" name="Прямоугольник со скругленными углами 3"/>
+          <p:cNvPr id="121" name="Прямоугольник со скругленными углами 3"/>
           <p:cNvSpPr/>
           <p:nvPr/>
         </p:nvSpPr>
         <p:spPr>
           <a:xfrm>
             <a:off x="0" y="3181680"/>
-            <a:ext cx="9143280" cy="1961280"/>
+            <a:ext cx="9142920" cy="1960920"/>
           </a:xfrm>
           <a:prstGeom prst="roundRect">
             <a:avLst>
@@ -7969,22 +7917,22 @@
               </a:rPr>
               <a:t>PIC</a:t>
             </a:r>
-            <a:endParaRPr b="0" lang="ru-RU" sz="1800" spc="-1" strike="noStrike">
-              <a:latin typeface="Arial"/>
-            </a:endParaRPr>
-          </a:p>
-        </p:txBody>
-      </p:sp>
-      <p:sp>
-        <p:nvSpPr>
-          <p:cNvPr id="123" name="TextBox 10"/>
+            <a:endParaRPr b="0" lang="en-US" sz="1800" spc="-1" strike="noStrike">
+              <a:latin typeface="Arial"/>
+            </a:endParaRPr>
+          </a:p>
+        </p:txBody>
+      </p:sp>
+      <p:sp>
+        <p:nvSpPr>
+          <p:cNvPr id="122" name="TextBox 10"/>
           <p:cNvSpPr/>
           <p:nvPr/>
         </p:nvSpPr>
         <p:spPr>
           <a:xfrm>
             <a:off x="384840" y="801360"/>
-            <a:ext cx="2443320" cy="713520"/>
+            <a:ext cx="2442960" cy="713160"/>
           </a:xfrm>
           <a:prstGeom prst="rect">
             <a:avLst/>
@@ -8021,22 +7969,22 @@
               </a:rPr>
               <a:t>SUBTITLE1</a:t>
             </a:r>
-            <a:endParaRPr b="0" lang="ru-RU" sz="1400" spc="-1" strike="noStrike">
-              <a:latin typeface="Arial"/>
-            </a:endParaRPr>
-          </a:p>
-        </p:txBody>
-      </p:sp>
-      <p:sp>
-        <p:nvSpPr>
-          <p:cNvPr id="124" name="TextBox 10"/>
+            <a:endParaRPr b="0" lang="en-US" sz="1400" spc="-1" strike="noStrike">
+              <a:latin typeface="Arial"/>
+            </a:endParaRPr>
+          </a:p>
+        </p:txBody>
+      </p:sp>
+      <p:sp>
+        <p:nvSpPr>
+          <p:cNvPr id="123" name="TextBox 10"/>
           <p:cNvSpPr/>
           <p:nvPr/>
         </p:nvSpPr>
         <p:spPr>
           <a:xfrm>
             <a:off x="384840" y="1585800"/>
-            <a:ext cx="2443320" cy="1564920"/>
+            <a:ext cx="2442960" cy="1564560"/>
           </a:xfrm>
           <a:prstGeom prst="rect">
             <a:avLst/>
@@ -8083,22 +8031,22 @@
               </a:rPr>
               <a:t>1</a:t>
             </a:r>
-            <a:endParaRPr b="0" lang="ru-RU" sz="1100" spc="-1" strike="noStrike">
-              <a:latin typeface="Arial"/>
-            </a:endParaRPr>
-          </a:p>
-        </p:txBody>
-      </p:sp>
-      <p:sp>
-        <p:nvSpPr>
-          <p:cNvPr id="125" name="TextBox 10"/>
+            <a:endParaRPr b="0" lang="en-US" sz="1100" spc="-1" strike="noStrike">
+              <a:latin typeface="Arial"/>
+            </a:endParaRPr>
+          </a:p>
+        </p:txBody>
+      </p:sp>
+      <p:sp>
+        <p:nvSpPr>
+          <p:cNvPr id="124" name="TextBox 10"/>
           <p:cNvSpPr/>
           <p:nvPr/>
         </p:nvSpPr>
         <p:spPr>
           <a:xfrm>
             <a:off x="3269880" y="801360"/>
-            <a:ext cx="2443320" cy="713520"/>
+            <a:ext cx="2442960" cy="713160"/>
           </a:xfrm>
           <a:prstGeom prst="rect">
             <a:avLst/>
@@ -8135,22 +8083,22 @@
               </a:rPr>
               <a:t>SUBTITLE2</a:t>
             </a:r>
-            <a:endParaRPr b="0" lang="ru-RU" sz="1400" spc="-1" strike="noStrike">
-              <a:latin typeface="Arial"/>
-            </a:endParaRPr>
-          </a:p>
-        </p:txBody>
-      </p:sp>
-      <p:sp>
-        <p:nvSpPr>
-          <p:cNvPr id="126" name="TextBox 10"/>
+            <a:endParaRPr b="0" lang="en-US" sz="1400" spc="-1" strike="noStrike">
+              <a:latin typeface="Arial"/>
+            </a:endParaRPr>
+          </a:p>
+        </p:txBody>
+      </p:sp>
+      <p:sp>
+        <p:nvSpPr>
+          <p:cNvPr id="125" name="TextBox 10"/>
           <p:cNvSpPr/>
           <p:nvPr/>
         </p:nvSpPr>
         <p:spPr>
           <a:xfrm>
             <a:off x="3269880" y="1585800"/>
-            <a:ext cx="2443320" cy="1564920"/>
+            <a:ext cx="2442960" cy="1564560"/>
           </a:xfrm>
           <a:prstGeom prst="rect">
             <a:avLst/>
@@ -8197,22 +8145,22 @@
               </a:rPr>
               <a:t>2</a:t>
             </a:r>
-            <a:endParaRPr b="0" lang="ru-RU" sz="1100" spc="-1" strike="noStrike">
-              <a:latin typeface="Arial"/>
-            </a:endParaRPr>
-          </a:p>
-        </p:txBody>
-      </p:sp>
-      <p:sp>
-        <p:nvSpPr>
-          <p:cNvPr id="127" name="TextBox 10"/>
+            <a:endParaRPr b="0" lang="en-US" sz="1100" spc="-1" strike="noStrike">
+              <a:latin typeface="Arial"/>
+            </a:endParaRPr>
+          </a:p>
+        </p:txBody>
+      </p:sp>
+      <p:sp>
+        <p:nvSpPr>
+          <p:cNvPr id="126" name="TextBox 10"/>
           <p:cNvSpPr/>
           <p:nvPr/>
         </p:nvSpPr>
         <p:spPr>
           <a:xfrm>
             <a:off x="6154560" y="801360"/>
-            <a:ext cx="2664720" cy="713520"/>
+            <a:ext cx="2664360" cy="713160"/>
           </a:xfrm>
           <a:prstGeom prst="rect">
             <a:avLst/>
@@ -8249,22 +8197,22 @@
               </a:rPr>
               <a:t>SUBTITLE3</a:t>
             </a:r>
-            <a:endParaRPr b="0" lang="ru-RU" sz="1400" spc="-1" strike="noStrike">
-              <a:latin typeface="Arial"/>
-            </a:endParaRPr>
-          </a:p>
-        </p:txBody>
-      </p:sp>
-      <p:sp>
-        <p:nvSpPr>
-          <p:cNvPr id="128" name="TextBox 10"/>
+            <a:endParaRPr b="0" lang="en-US" sz="1400" spc="-1" strike="noStrike">
+              <a:latin typeface="Arial"/>
+            </a:endParaRPr>
+          </a:p>
+        </p:txBody>
+      </p:sp>
+      <p:sp>
+        <p:nvSpPr>
+          <p:cNvPr id="127" name="TextBox 10"/>
           <p:cNvSpPr/>
           <p:nvPr/>
         </p:nvSpPr>
         <p:spPr>
           <a:xfrm>
             <a:off x="6154560" y="1585800"/>
-            <a:ext cx="2664720" cy="1564920"/>
+            <a:ext cx="2664360" cy="1564560"/>
           </a:xfrm>
           <a:prstGeom prst="rect">
             <a:avLst/>
@@ -8311,7 +8259,7 @@
               </a:rPr>
               <a:t>3</a:t>
             </a:r>
-            <a:endParaRPr b="0" lang="ru-RU" sz="1100" spc="-1" strike="noStrike">
+            <a:endParaRPr b="0" lang="en-US" sz="1100" spc="-1" strike="noStrike">
               <a:latin typeface="Arial"/>
             </a:endParaRPr>
           </a:p>
@@ -8319,7 +8267,7 @@
       </p:sp>
       <p:grpSp>
         <p:nvGrpSpPr>
-          <p:cNvPr id="129" name="Группа 8"/>
+          <p:cNvPr id="128" name="Группа 8"/>
           <p:cNvGrpSpPr/>
           <p:nvPr/>
         </p:nvGrpSpPr>
@@ -8333,7 +8281,7 @@
         </p:grpSpPr>
         <p:sp>
           <p:nvSpPr>
-            <p:cNvPr id="130" name="Прямая соединительная линия 7"/>
+            <p:cNvPr id="129" name="Прямая соединительная линия 7"/>
             <p:cNvSpPr/>
             <p:nvPr/>
           </p:nvSpPr>
@@ -8366,7 +8314,7 @@
         </p:sp>
         <p:sp>
           <p:nvSpPr>
-            <p:cNvPr id="131" name="Прямая соединительная линия 22"/>
+            <p:cNvPr id="130" name="Прямая соединительная линия 22"/>
             <p:cNvSpPr/>
             <p:nvPr/>
           </p:nvSpPr>
@@ -8400,7 +8348,7 @@
       </p:grpSp>
       <p:grpSp>
         <p:nvGrpSpPr>
-          <p:cNvPr id="132" name="Группа 23"/>
+          <p:cNvPr id="131" name="Группа 23"/>
           <p:cNvGrpSpPr/>
           <p:nvPr/>
         </p:nvGrpSpPr>
@@ -8414,7 +8362,7 @@
         </p:grpSpPr>
         <p:sp>
           <p:nvSpPr>
-            <p:cNvPr id="133" name="Прямая соединительная линия 30"/>
+            <p:cNvPr id="132" name="Прямая соединительная линия 30"/>
             <p:cNvSpPr/>
             <p:nvPr/>
           </p:nvSpPr>
@@ -8447,7 +8395,7 @@
         </p:sp>
         <p:sp>
           <p:nvSpPr>
-            <p:cNvPr id="134" name="Прямая соединительная линия 31"/>
+            <p:cNvPr id="133" name="Прямая соединительная линия 31"/>
             <p:cNvSpPr/>
             <p:nvPr/>
           </p:nvSpPr>
@@ -8481,14 +8429,14 @@
       </p:grpSp>
       <p:sp>
         <p:nvSpPr>
-          <p:cNvPr id="135" name=""/>
+          <p:cNvPr id="134" name=""/>
           <p:cNvSpPr/>
           <p:nvPr/>
         </p:nvSpPr>
         <p:spPr>
           <a:xfrm>
             <a:off x="349200" y="264600"/>
-            <a:ext cx="8229240" cy="345960"/>
+            <a:ext cx="8228880" cy="345600"/>
           </a:xfrm>
           <a:prstGeom prst="rect">
             <a:avLst/>
@@ -8517,11 +8465,15 @@
             </a:pPr>
             <a:r>
               <a:rPr b="0" lang="en-US" sz="1800" spc="-1" strike="noStrike">
-                <a:latin typeface="Arial"/>
+                <a:solidFill>
+                  <a:srgbClr val="000000"/>
+                </a:solidFill>
+                <a:latin typeface="Arial"/>
+                <a:ea typeface="DejaVu Sans"/>
               </a:rPr>
               <a:t>TITLE</a:t>
             </a:r>
-            <a:endParaRPr b="0" lang="ru-RU" sz="1800" spc="-1" strike="noStrike">
+            <a:endParaRPr b="0" lang="en-US" sz="1800" spc="-1" strike="noStrike">
               <a:latin typeface="Arial"/>
             </a:endParaRPr>
           </a:p>
@@ -8566,14 +8518,14 @@
       </p:grpSpPr>
       <p:sp>
         <p:nvSpPr>
-          <p:cNvPr id="136" name="Прямоугольник со скругленными углами 3"/>
+          <p:cNvPr id="135" name="Прямоугольник со скругленными углами 3"/>
           <p:cNvSpPr/>
           <p:nvPr/>
         </p:nvSpPr>
         <p:spPr>
           <a:xfrm>
             <a:off x="5884200" y="0"/>
-            <a:ext cx="3259080" cy="5142960"/>
+            <a:ext cx="3258720" cy="5142600"/>
           </a:xfrm>
           <a:prstGeom prst="roundRect">
             <a:avLst>
@@ -8624,22 +8576,22 @@
               </a:rPr>
               <a:t>PIC</a:t>
             </a:r>
-            <a:endParaRPr b="0" lang="ru-RU" sz="1800" spc="-1" strike="noStrike">
-              <a:latin typeface="Arial"/>
-            </a:endParaRPr>
-          </a:p>
-        </p:txBody>
-      </p:sp>
-      <p:sp>
-        <p:nvSpPr>
-          <p:cNvPr id="137" name="Прямоугольник: скругленные углы 12"/>
+            <a:endParaRPr b="0" lang="en-US" sz="1800" spc="-1" strike="noStrike">
+              <a:latin typeface="Arial"/>
+            </a:endParaRPr>
+          </a:p>
+        </p:txBody>
+      </p:sp>
+      <p:sp>
+        <p:nvSpPr>
+          <p:cNvPr id="136" name="Прямоугольник: скругленные углы 12"/>
           <p:cNvSpPr/>
           <p:nvPr/>
         </p:nvSpPr>
         <p:spPr>
           <a:xfrm>
             <a:off x="384840" y="3378240"/>
-            <a:ext cx="5236200" cy="1320840"/>
+            <a:ext cx="5235840" cy="1320480"/>
           </a:xfrm>
           <a:prstGeom prst="roundRect">
             <a:avLst>
@@ -8670,14 +8622,14 @@
       </p:sp>
       <p:sp>
         <p:nvSpPr>
-          <p:cNvPr id="138" name="Прямоугольник: скругленные углы 13"/>
+          <p:cNvPr id="137" name="Прямоугольник: скругленные углы 13"/>
           <p:cNvSpPr/>
           <p:nvPr/>
         </p:nvSpPr>
         <p:spPr>
           <a:xfrm>
             <a:off x="3091680" y="1135080"/>
-            <a:ext cx="2532960" cy="2056680"/>
+            <a:ext cx="2532600" cy="2056320"/>
           </a:xfrm>
           <a:prstGeom prst="roundRect">
             <a:avLst>
@@ -8708,14 +8660,14 @@
       </p:sp>
       <p:sp>
         <p:nvSpPr>
-          <p:cNvPr id="139" name="Прямоугольник: скругленные углы 14"/>
+          <p:cNvPr id="138" name="Прямоугольник: скругленные углы 14"/>
           <p:cNvSpPr/>
           <p:nvPr/>
         </p:nvSpPr>
         <p:spPr>
           <a:xfrm>
             <a:off x="387720" y="1120680"/>
-            <a:ext cx="2532960" cy="2056680"/>
+            <a:ext cx="2532600" cy="2056320"/>
           </a:xfrm>
           <a:prstGeom prst="roundRect">
             <a:avLst>
@@ -8746,14 +8698,14 @@
       </p:sp>
       <p:sp>
         <p:nvSpPr>
-          <p:cNvPr id="140" name="TextBox 10"/>
+          <p:cNvPr id="139" name="TextBox 10"/>
           <p:cNvSpPr/>
           <p:nvPr/>
         </p:nvSpPr>
         <p:spPr>
           <a:xfrm>
             <a:off x="476280" y="1176840"/>
-            <a:ext cx="2343240" cy="713520"/>
+            <a:ext cx="2342880" cy="713160"/>
           </a:xfrm>
           <a:prstGeom prst="rect">
             <a:avLst/>
@@ -8800,22 +8752,22 @@
               </a:rPr>
               <a:t>1</a:t>
             </a:r>
-            <a:endParaRPr b="0" lang="ru-RU" sz="1400" spc="-1" strike="noStrike">
-              <a:latin typeface="Arial"/>
-            </a:endParaRPr>
-          </a:p>
-        </p:txBody>
-      </p:sp>
-      <p:sp>
-        <p:nvSpPr>
-          <p:cNvPr id="141" name="TextBox 10"/>
+            <a:endParaRPr b="0" lang="en-US" sz="1400" spc="-1" strike="noStrike">
+              <a:latin typeface="Arial"/>
+            </a:endParaRPr>
+          </a:p>
+        </p:txBody>
+      </p:sp>
+      <p:sp>
+        <p:nvSpPr>
+          <p:cNvPr id="140" name="TextBox 10"/>
           <p:cNvSpPr/>
           <p:nvPr/>
         </p:nvSpPr>
         <p:spPr>
           <a:xfrm>
             <a:off x="476280" y="1961280"/>
-            <a:ext cx="2343240" cy="1141920"/>
+            <a:ext cx="2342880" cy="1141560"/>
           </a:xfrm>
           <a:prstGeom prst="rect">
             <a:avLst/>
@@ -8862,22 +8814,22 @@
               </a:rPr>
               <a:t>1</a:t>
             </a:r>
-            <a:endParaRPr b="0" lang="ru-RU" sz="1100" spc="-1" strike="noStrike">
-              <a:latin typeface="Arial"/>
-            </a:endParaRPr>
-          </a:p>
-        </p:txBody>
-      </p:sp>
-      <p:sp>
-        <p:nvSpPr>
-          <p:cNvPr id="142" name="TextBox 10"/>
+            <a:endParaRPr b="0" lang="en-US" sz="1100" spc="-1" strike="noStrike">
+              <a:latin typeface="Arial"/>
+            </a:endParaRPr>
+          </a:p>
+        </p:txBody>
+      </p:sp>
+      <p:sp>
+        <p:nvSpPr>
+          <p:cNvPr id="141" name="TextBox 10"/>
           <p:cNvSpPr/>
           <p:nvPr/>
         </p:nvSpPr>
         <p:spPr>
           <a:xfrm>
             <a:off x="3179880" y="1176840"/>
-            <a:ext cx="2340000" cy="713520"/>
+            <a:ext cx="2339640" cy="713160"/>
           </a:xfrm>
           <a:prstGeom prst="rect">
             <a:avLst/>
@@ -8914,22 +8866,22 @@
               </a:rPr>
               <a:t>SUBTITLE2</a:t>
             </a:r>
-            <a:endParaRPr b="0" lang="ru-RU" sz="1400" spc="-1" strike="noStrike">
-              <a:latin typeface="Arial"/>
-            </a:endParaRPr>
-          </a:p>
-        </p:txBody>
-      </p:sp>
-      <p:sp>
-        <p:nvSpPr>
-          <p:cNvPr id="143" name="TextBox 10"/>
+            <a:endParaRPr b="0" lang="en-US" sz="1400" spc="-1" strike="noStrike">
+              <a:latin typeface="Arial"/>
+            </a:endParaRPr>
+          </a:p>
+        </p:txBody>
+      </p:sp>
+      <p:sp>
+        <p:nvSpPr>
+          <p:cNvPr id="142" name="TextBox 10"/>
           <p:cNvSpPr/>
           <p:nvPr/>
         </p:nvSpPr>
         <p:spPr>
           <a:xfrm>
             <a:off x="3179880" y="1961280"/>
-            <a:ext cx="2340000" cy="1141920"/>
+            <a:ext cx="2339640" cy="1141560"/>
           </a:xfrm>
           <a:prstGeom prst="rect">
             <a:avLst/>
@@ -8976,22 +8928,22 @@
               </a:rPr>
               <a:t>2</a:t>
             </a:r>
-            <a:endParaRPr b="0" lang="ru-RU" sz="1100" spc="-1" strike="noStrike">
-              <a:latin typeface="Arial"/>
-            </a:endParaRPr>
-          </a:p>
-        </p:txBody>
-      </p:sp>
-      <p:sp>
-        <p:nvSpPr>
-          <p:cNvPr id="144" name="TextBox 10"/>
+            <a:endParaRPr b="0" lang="en-US" sz="1100" spc="-1" strike="noStrike">
+              <a:latin typeface="Arial"/>
+            </a:endParaRPr>
+          </a:p>
+        </p:txBody>
+      </p:sp>
+      <p:sp>
+        <p:nvSpPr>
+          <p:cNvPr id="143" name="TextBox 10"/>
           <p:cNvSpPr/>
           <p:nvPr/>
         </p:nvSpPr>
         <p:spPr>
           <a:xfrm>
             <a:off x="476280" y="3479760"/>
-            <a:ext cx="5236200" cy="328680"/>
+            <a:ext cx="5235840" cy="328320"/>
           </a:xfrm>
           <a:prstGeom prst="rect">
             <a:avLst/>
@@ -9028,22 +8980,22 @@
               </a:rPr>
               <a:t>SUBTITLE3</a:t>
             </a:r>
-            <a:endParaRPr b="0" lang="ru-RU" sz="1400" spc="-1" strike="noStrike">
-              <a:latin typeface="Arial"/>
-            </a:endParaRPr>
-          </a:p>
-        </p:txBody>
-      </p:sp>
-      <p:sp>
-        <p:nvSpPr>
-          <p:cNvPr id="145" name="TextBox 10"/>
+            <a:endParaRPr b="0" lang="en-US" sz="1400" spc="-1" strike="noStrike">
+              <a:latin typeface="Arial"/>
+            </a:endParaRPr>
+          </a:p>
+        </p:txBody>
+      </p:sp>
+      <p:sp>
+        <p:nvSpPr>
+          <p:cNvPr id="144" name="TextBox 10"/>
           <p:cNvSpPr/>
           <p:nvPr/>
         </p:nvSpPr>
         <p:spPr>
           <a:xfrm>
             <a:off x="476280" y="3831480"/>
-            <a:ext cx="5146560" cy="713520"/>
+            <a:ext cx="5146200" cy="713160"/>
           </a:xfrm>
           <a:prstGeom prst="rect">
             <a:avLst/>
@@ -9090,22 +9042,22 @@
               </a:rPr>
               <a:t>3</a:t>
             </a:r>
-            <a:endParaRPr b="0" lang="ru-RU" sz="1100" spc="-1" strike="noStrike">
-              <a:latin typeface="Arial"/>
-            </a:endParaRPr>
-          </a:p>
-        </p:txBody>
-      </p:sp>
-      <p:sp>
-        <p:nvSpPr>
-          <p:cNvPr id="146" name="TextBox 20"/>
+            <a:endParaRPr b="0" lang="en-US" sz="1100" spc="-1" strike="noStrike">
+              <a:latin typeface="Arial"/>
+            </a:endParaRPr>
+          </a:p>
+        </p:txBody>
+      </p:sp>
+      <p:sp>
+        <p:nvSpPr>
+          <p:cNvPr id="145" name="TextBox 20"/>
           <p:cNvSpPr/>
           <p:nvPr/>
         </p:nvSpPr>
         <p:spPr>
           <a:xfrm>
             <a:off x="338760" y="160560"/>
-            <a:ext cx="5282280" cy="927360"/>
+            <a:ext cx="5281920" cy="927000"/>
           </a:xfrm>
           <a:prstGeom prst="rect">
             <a:avLst/>
@@ -9142,7 +9094,7 @@
               </a:rPr>
               <a:t>TITLE</a:t>
             </a:r>
-            <a:endParaRPr b="0" lang="ru-RU" sz="2200" spc="-1" strike="noStrike">
+            <a:endParaRPr b="0" lang="en-US" sz="2200" spc="-1" strike="noStrike">
               <a:latin typeface="Arial"/>
             </a:endParaRPr>
           </a:p>
